--- a/lessons/lesson-15/slides.pptx
+++ b/lessons/lesson-15/slides.pptx
@@ -2,28 +2,29 @@
 <file path=ppt/presentation.xml><?xml version="1.0" encoding="utf-8"?>
 <p:presentation xmlns:p="http://schemas.openxmlformats.org/presentationml/2006/main">
   <p:sldMasterIdLst>
-    <p:sldMasterId xmlns:r="http://schemas.openxmlformats.org/officeDocument/2006/relationships" id="2147483648" r:id="R87fcc4f435a543e2"/>
+    <p:sldMasterId xmlns:r="http://schemas.openxmlformats.org/officeDocument/2006/relationships" id="2147483648" r:id="Ra19c91d36d4a46e3"/>
   </p:sldMasterIdLst>
   <p:notesMasterIdLst>
-    <p:notesMasterId xmlns:r="http://schemas.openxmlformats.org/officeDocument/2006/relationships" r:id="Rb71e2af0ab194d73"/>
+    <p:notesMasterId xmlns:r="http://schemas.openxmlformats.org/officeDocument/2006/relationships" r:id="Re934ae9c2ff6416f"/>
   </p:notesMasterIdLst>
   <p:sldIdLst>
-    <p:sldId xmlns:r="http://schemas.openxmlformats.org/officeDocument/2006/relationships" id="256" r:id="Rd692813b41ee4ecc"/>
-    <p:sldId xmlns:r="http://schemas.openxmlformats.org/officeDocument/2006/relationships" id="257" r:id="Ra5f53f05f96e4fbf"/>
-    <p:sldId xmlns:r="http://schemas.openxmlformats.org/officeDocument/2006/relationships" id="258" r:id="R17a5cf52fa4a451a"/>
-    <p:sldId xmlns:r="http://schemas.openxmlformats.org/officeDocument/2006/relationships" id="259" r:id="R26deae40a67447c4"/>
-    <p:sldId xmlns:r="http://schemas.openxmlformats.org/officeDocument/2006/relationships" id="260" r:id="Rc52a113deea840fc"/>
-    <p:sldId xmlns:r="http://schemas.openxmlformats.org/officeDocument/2006/relationships" id="261" r:id="Re488835f327d489b"/>
-    <p:sldId xmlns:r="http://schemas.openxmlformats.org/officeDocument/2006/relationships" id="262" r:id="R3239c63aba554c69"/>
-    <p:sldId xmlns:r="http://schemas.openxmlformats.org/officeDocument/2006/relationships" id="263" r:id="R72c7a10ab4644ab9"/>
-    <p:sldId xmlns:r="http://schemas.openxmlformats.org/officeDocument/2006/relationships" id="264" r:id="R8fa83eb226f24706"/>
-    <p:sldId xmlns:r="http://schemas.openxmlformats.org/officeDocument/2006/relationships" id="265" r:id="R7999cf11f6bd426c"/>
-    <p:sldId xmlns:r="http://schemas.openxmlformats.org/officeDocument/2006/relationships" id="266" r:id="Rf4f77e1ff3b14f90"/>
-    <p:sldId xmlns:r="http://schemas.openxmlformats.org/officeDocument/2006/relationships" id="267" r:id="R68dec48eba9b4e6a"/>
-    <p:sldId xmlns:r="http://schemas.openxmlformats.org/officeDocument/2006/relationships" id="268" r:id="Ra9fe400c2e83420d"/>
-    <p:sldId xmlns:r="http://schemas.openxmlformats.org/officeDocument/2006/relationships" id="269" r:id="R5cb0a78bee294002"/>
-    <p:sldId xmlns:r="http://schemas.openxmlformats.org/officeDocument/2006/relationships" id="270" r:id="R5cd6fd13a33148ba"/>
-    <p:sldId xmlns:r="http://schemas.openxmlformats.org/officeDocument/2006/relationships" id="271" r:id="R7632ff8e6dd5403e"/>
+    <p:sldId xmlns:r="http://schemas.openxmlformats.org/officeDocument/2006/relationships" id="256" r:id="R545e9319d2784d4c"/>
+    <p:sldId xmlns:r="http://schemas.openxmlformats.org/officeDocument/2006/relationships" id="257" r:id="Rf3efc75db9224d4c"/>
+    <p:sldId xmlns:r="http://schemas.openxmlformats.org/officeDocument/2006/relationships" id="258" r:id="R61212e50a1c84c4e"/>
+    <p:sldId xmlns:r="http://schemas.openxmlformats.org/officeDocument/2006/relationships" id="259" r:id="R0a3c81fef11f4450"/>
+    <p:sldId xmlns:r="http://schemas.openxmlformats.org/officeDocument/2006/relationships" id="260" r:id="R38fed2aabe5e481a"/>
+    <p:sldId xmlns:r="http://schemas.openxmlformats.org/officeDocument/2006/relationships" id="261" r:id="R6de6276c75684ae6"/>
+    <p:sldId xmlns:r="http://schemas.openxmlformats.org/officeDocument/2006/relationships" id="262" r:id="Rd45c6df5a2374d5e"/>
+    <p:sldId xmlns:r="http://schemas.openxmlformats.org/officeDocument/2006/relationships" id="263" r:id="Ra883b45e9c5b420f"/>
+    <p:sldId xmlns:r="http://schemas.openxmlformats.org/officeDocument/2006/relationships" id="264" r:id="R8948e8c70b2445e8"/>
+    <p:sldId xmlns:r="http://schemas.openxmlformats.org/officeDocument/2006/relationships" id="265" r:id="R7db2aa05398e48a2"/>
+    <p:sldId xmlns:r="http://schemas.openxmlformats.org/officeDocument/2006/relationships" id="266" r:id="Red7254960de14fb1"/>
+    <p:sldId xmlns:r="http://schemas.openxmlformats.org/officeDocument/2006/relationships" id="267" r:id="Rab78781f8bee4c61"/>
+    <p:sldId xmlns:r="http://schemas.openxmlformats.org/officeDocument/2006/relationships" id="268" r:id="R543105c19a5f461d"/>
+    <p:sldId xmlns:r="http://schemas.openxmlformats.org/officeDocument/2006/relationships" id="269" r:id="R50aef6d37346497a"/>
+    <p:sldId xmlns:r="http://schemas.openxmlformats.org/officeDocument/2006/relationships" id="270" r:id="R2394793b2af94b49"/>
+    <p:sldId xmlns:r="http://schemas.openxmlformats.org/officeDocument/2006/relationships" id="271" r:id="R03b6249161ee4bca"/>
+    <p:sldId xmlns:r="http://schemas.openxmlformats.org/officeDocument/2006/relationships" id="272" r:id="Ra01b1998beba4004"/>
   </p:sldIdLst>
   <p:sldSz cx="12192000" cy="6858000"/>
   <p:notesSz cx="6858000" cy="9144000"/>
@@ -403,7 +404,7 @@
           <a:lstStyle xmlns:a="http://schemas.openxmlformats.org/drawingml/2006/main"/>
           <a:p xmlns:a="http://schemas.openxmlformats.org/drawingml/2006/main">
             <a:r>
-              <a:t>本课把内部初稿暴露给固定同伴组，目标是提前暴露致命缺口，不是排名。</a:t>
+              <a:t>本讲聚焦“同行评审、论证门预检与修改工作坊”。封面只保留正式课名，课堂问题从下一页展开。</a:t>
             </a:r>
           </a:p>
           <a:p xmlns:a="http://schemas.openxmlformats.org/drawingml/2006/main">
@@ -418,12 +419,12 @@
           </a:p>
           <a:p xmlns:a="http://schemas.openxmlformats.org/drawingml/2006/main">
             <a:r>
-              <a:t>- /Users/bright/Projects/courses/graduate/course/assignments.md</a:t>
-            </a:r>
-          </a:p>
-          <a:p xmlns:a="http://schemas.openxmlformats.org/drawingml/2006/main">
-            <a:r>
-              <a:t>- /Users/bright/Projects/courses/graduate/lessons/备课规划.md</a:t>
+              <a:t>- /Users/bright/Projects/courses/graduate/course/syllabus.md</a:t>
+            </a:r>
+          </a:p>
+          <a:p xmlns:a="http://schemas.openxmlformats.org/drawingml/2006/main">
+            <a:r>
+              <a:t>- /Users/bright/Projects/courses/graduate/lessons/lesson-15/slides.md</a:t>
             </a:r>
           </a:p>
           <a:p xmlns:a="http://schemas.openxmlformats.org/drawingml/2006/main">
@@ -778,7 +779,7 @@
           <a:lstStyle xmlns:a="http://schemas.openxmlformats.org/drawingml/2006/main"/>
           <a:p xmlns:a="http://schemas.openxmlformats.org/drawingml/2006/main">
             <a:r>
-              <a:t>82-90分钟生成优先级并桥接第16课，不要求当场修完。</a:t>
+              <a:t>回收本讲核心概念及其关系。本页不新增任务；请学生用边界句检查自己的项目工件。</a:t>
             </a:r>
           </a:p>
           <a:p xmlns:a="http://schemas.openxmlformats.org/drawingml/2006/main">
@@ -793,12 +794,17 @@
           </a:p>
           <a:p xmlns:a="http://schemas.openxmlformats.org/drawingml/2006/main">
             <a:r>
-              <a:t>- /Users/bright/Projects/courses/graduate/course/assignments.md</a:t>
-            </a:r>
-          </a:p>
-          <a:p xmlns:a="http://schemas.openxmlformats.org/drawingml/2006/main">
-            <a:r>
-              <a:t>- /Users/bright/Projects/courses/graduate/lessons/备课规划.md</a:t>
+              <a:t>- /Users/bright/Projects/courses/graduate/course/syllabus.md</a:t>
+            </a:r>
+          </a:p>
+          <a:p xmlns:a="http://schemas.openxmlformats.org/drawingml/2006/main">
+            <a:r>
+              <a:t>- /Users/bright/Projects/courses/graduate/lessons/lesson-15/handout.md</a:t>
+            </a:r>
+          </a:p>
+          <a:p xmlns:a="http://schemas.openxmlformats.org/drawingml/2006/main">
+            <a:r>
+              <a:t>- /Users/bright/Projects/courses/graduate/lessons/lesson-15/slides.md</a:t>
             </a:r>
           </a:p>
           <a:p xmlns:a="http://schemas.openxmlformats.org/drawingml/2006/main">
@@ -873,7 +879,7 @@
           <a:lstStyle xmlns:a="http://schemas.openxmlformats.org/drawingml/2006/main"/>
           <a:p xmlns:a="http://schemas.openxmlformats.org/drawingml/2006/main">
             <a:r>
-              <a:t>备用实践索引，仅在学生需要路径提示时使用。</a:t>
+              <a:t>82-90分钟生成优先级并桥接第16课，不要求当场修完。</a:t>
             </a:r>
           </a:p>
           <a:p xmlns:a="http://schemas.openxmlformats.org/drawingml/2006/main">
@@ -888,7 +894,12 @@
           </a:p>
           <a:p xmlns:a="http://schemas.openxmlformats.org/drawingml/2006/main">
             <a:r>
-              <a:t>- /Users/bright/Projects/courses/graduate/lessons/lesson-15/teaching-plan.md</a:t>
+              <a:t>- /Users/bright/Projects/courses/graduate/course/assignments.md</a:t>
+            </a:r>
+          </a:p>
+          <a:p xmlns:a="http://schemas.openxmlformats.org/drawingml/2006/main">
+            <a:r>
+              <a:t>- /Users/bright/Projects/courses/graduate/lessons/备课规划.md</a:t>
             </a:r>
           </a:p>
           <a:p xmlns:a="http://schemas.openxmlformats.org/drawingml/2006/main">
@@ -963,7 +974,7 @@
           <a:lstStyle xmlns:a="http://schemas.openxmlformats.org/drawingml/2006/main"/>
           <a:p xmlns:a="http://schemas.openxmlformats.org/drawingml/2006/main">
             <a:r>
-              <a:t>备用反例用于评审语言校准。</a:t>
+              <a:t>备用实践索引，仅在学生需要路径提示时使用。</a:t>
             </a:r>
           </a:p>
           <a:p xmlns:a="http://schemas.openxmlformats.org/drawingml/2006/main">
@@ -978,12 +989,7 @@
           </a:p>
           <a:p xmlns:a="http://schemas.openxmlformats.org/drawingml/2006/main">
             <a:r>
-              <a:t>- Teaching artifact; fictional review comment.</a:t>
-            </a:r>
-          </a:p>
-          <a:p xmlns:a="http://schemas.openxmlformats.org/drawingml/2006/main">
-            <a:r>
-              <a:t>- /Users/bright/Projects/courses/graduate/lessons/lesson-15/handout.md</a:t>
+              <a:t>- /Users/bright/Projects/courses/graduate/lessons/lesson-15/teaching-plan.md</a:t>
             </a:r>
           </a:p>
           <a:p xmlns:a="http://schemas.openxmlformats.org/drawingml/2006/main">
@@ -1019,6 +1025,101 @@
 </file>
 
 <file path=ppt/notesSlides/notesSlide16.xml><?xml version="1.0" encoding="utf-8"?>
+<p:notes xmlns:p="http://schemas.openxmlformats.org/presentationml/2006/main">
+  <p:cSld>
+    <p:spTree>
+      <p:nvGrpSpPr>
+        <p:cNvPr id="1" name=""/>
+        <p:cNvGrpSpPr/>
+        <p:nvPr/>
+      </p:nvGrpSpPr>
+      <p:grpSpPr>
+        <a:xfrm xmlns:a="http://schemas.openxmlformats.org/drawingml/2006/main"/>
+      </p:grpSpPr>
+      <p:sp>
+        <p:nvSpPr>
+          <p:cNvPr id="2" name="Slide Image Placeholder 1"/>
+          <p:cNvSpPr>
+            <a:spLocks xmlns:a="http://schemas.openxmlformats.org/drawingml/2006/main" noGrp="1"/>
+          </p:cNvSpPr>
+          <p:nvPr>
+            <p:ph type="sldImg" idx="0"/>
+          </p:nvPr>
+        </p:nvSpPr>
+        <p:spPr/>
+      </p:sp>
+      <p:sp>
+        <p:nvSpPr>
+          <p:cNvPr id="3" name="Notes Placeholder 2"/>
+          <p:cNvSpPr>
+            <a:spLocks xmlns:a="http://schemas.openxmlformats.org/drawingml/2006/main" noGrp="1"/>
+          </p:cNvSpPr>
+          <p:nvPr>
+            <p:ph type="body" idx="1"/>
+          </p:nvPr>
+        </p:nvSpPr>
+        <p:spPr/>
+        <p:txBody>
+          <a:bodyPr xmlns:a="http://schemas.openxmlformats.org/drawingml/2006/main"/>
+          <a:lstStyle xmlns:a="http://schemas.openxmlformats.org/drawingml/2006/main"/>
+          <a:p xmlns:a="http://schemas.openxmlformats.org/drawingml/2006/main">
+            <a:r>
+              <a:t>备用反例用于评审语言校准。</a:t>
+            </a:r>
+          </a:p>
+          <a:p xmlns:a="http://schemas.openxmlformats.org/drawingml/2006/main">
+            <a:r>
+              <a:t/>
+            </a:r>
+          </a:p>
+          <a:p xmlns:a="http://schemas.openxmlformats.org/drawingml/2006/main">
+            <a:r>
+              <a:t>[Sources]</a:t>
+            </a:r>
+          </a:p>
+          <a:p xmlns:a="http://schemas.openxmlformats.org/drawingml/2006/main">
+            <a:r>
+              <a:t>- Teaching artifact; fictional review comment.</a:t>
+            </a:r>
+          </a:p>
+          <a:p xmlns:a="http://schemas.openxmlformats.org/drawingml/2006/main">
+            <a:r>
+              <a:t>- /Users/bright/Projects/courses/graduate/lessons/lesson-15/handout.md</a:t>
+            </a:r>
+          </a:p>
+          <a:p xmlns:a="http://schemas.openxmlformats.org/drawingml/2006/main">
+            <a:r>
+              <a:t>[/Sources]</a:t>
+            </a:r>
+          </a:p>
+        </p:txBody>
+      </p:sp>
+      <p:sp>
+        <p:nvSpPr>
+          <p:cNvPr id="4" name="Slide Number Placeholder 3"/>
+          <p:cNvSpPr>
+            <a:spLocks xmlns:a="http://schemas.openxmlformats.org/drawingml/2006/main" noGrp="1"/>
+          </p:cNvSpPr>
+          <p:nvPr>
+            <p:ph type="sldNum" idx="5"/>
+          </p:nvPr>
+        </p:nvSpPr>
+        <p:spPr/>
+        <p:txBody>
+          <a:bodyPr xmlns:a="http://schemas.openxmlformats.org/drawingml/2006/main"/>
+          <a:lstStyle xmlns:a="http://schemas.openxmlformats.org/drawingml/2006/main"/>
+          <a:p xmlns:a="http://schemas.openxmlformats.org/drawingml/2006/main"/>
+        </p:txBody>
+      </p:sp>
+    </p:spTree>
+  </p:cSld>
+  <p:clrMapOvr>
+    <a:masterClrMapping xmlns:a="http://schemas.openxmlformats.org/drawingml/2006/main"/>
+  </p:clrMapOvr>
+</p:notes>
+</file>
+
+<file path=ppt/notesSlides/notesSlide17.xml><?xml version="1.0" encoding="utf-8"?>
 <p:notes xmlns:p="http://schemas.openxmlformats.org/presentationml/2006/main">
   <p:cSld>
     <p:spTree>
@@ -1889,7 +1990,7 @@
           <p:nvPr/>
         </p:nvPicPr>
         <p:blipFill>
-          <a:blip xmlns:r="http://schemas.openxmlformats.org/officeDocument/2006/relationships" xmlns:a="http://schemas.openxmlformats.org/drawingml/2006/main" r:embed="R98318a7b53314937">
+          <a:blip xmlns:r="http://schemas.openxmlformats.org/officeDocument/2006/relationships" xmlns:a="http://schemas.openxmlformats.org/drawingml/2006/main" r:embed="Re938ea66450e4d00">
             <a:duotone>
               <a:prstClr val="black"/>
               <a:schemeClr val="accent1">
@@ -2067,7 +2168,7 @@
           <p:nvPr/>
         </p:nvPicPr>
         <p:blipFill rotWithShape="1">
-          <a:blip xmlns:r="http://schemas.openxmlformats.org/officeDocument/2006/relationships" xmlns:a="http://schemas.openxmlformats.org/drawingml/2006/main" r:embed="R70de640bcf904b5c"/>
+          <a:blip xmlns:r="http://schemas.openxmlformats.org/officeDocument/2006/relationships" xmlns:a="http://schemas.openxmlformats.org/drawingml/2006/main" r:embed="R181c419d43be41b6"/>
           <a:srcRect xmlns:a="http://schemas.openxmlformats.org/drawingml/2006/main" l="74359" t="0" r="1346" b="0"/>
           <a:stretch xmlns:a="http://schemas.openxmlformats.org/drawingml/2006/main"/>
         </p:blipFill>
@@ -2090,7 +2191,7 @@
           <p:nvPr/>
         </p:nvPicPr>
         <p:blipFill rotWithShape="1">
-          <a:blip xmlns:r="http://schemas.openxmlformats.org/officeDocument/2006/relationships" xmlns:a="http://schemas.openxmlformats.org/drawingml/2006/main" r:embed="Rc4197b1a581b4bc3">
+          <a:blip xmlns:r="http://schemas.openxmlformats.org/officeDocument/2006/relationships" xmlns:a="http://schemas.openxmlformats.org/drawingml/2006/main" r:embed="R3408c9930a9c4055">
             <a:alphaModFix amt="35000"/>
           </a:blip>
           <a:srcRect xmlns:a="http://schemas.openxmlformats.org/drawingml/2006/main" l="0" t="9831" r="0" b="36385"/>
@@ -2352,7 +2453,7 @@
           <p:nvPr/>
         </p:nvPicPr>
         <p:blipFill>
-          <a:blip xmlns:r="http://schemas.openxmlformats.org/officeDocument/2006/relationships" xmlns:a="http://schemas.openxmlformats.org/drawingml/2006/main" r:embed="R2acd09d358dd407f"/>
+          <a:blip xmlns:r="http://schemas.openxmlformats.org/officeDocument/2006/relationships" xmlns:a="http://schemas.openxmlformats.org/drawingml/2006/main" r:embed="Re89b066b7a054519"/>
           <a:srcRect xmlns:a="http://schemas.openxmlformats.org/drawingml/2006/main" l="0" t="0" r="54251" b="0"/>
           <a:stretch xmlns:a="http://schemas.openxmlformats.org/drawingml/2006/main"/>
         </p:blipFill>
@@ -2609,7 +2710,7 @@
           <p:nvPr/>
         </p:nvPicPr>
         <p:blipFill rotWithShape="1">
-          <a:blip xmlns:r="http://schemas.openxmlformats.org/officeDocument/2006/relationships" xmlns:a="http://schemas.openxmlformats.org/drawingml/2006/main" r:embed="R9aa75883933e489b"/>
+          <a:blip xmlns:r="http://schemas.openxmlformats.org/officeDocument/2006/relationships" xmlns:a="http://schemas.openxmlformats.org/drawingml/2006/main" r:embed="R8c9cf61dd4704b07"/>
           <a:srcRect xmlns:a="http://schemas.openxmlformats.org/drawingml/2006/main" l="0" t="0" r="1346" b="0"/>
           <a:stretch xmlns:a="http://schemas.openxmlformats.org/drawingml/2006/main"/>
         </p:blipFill>
@@ -2792,7 +2893,7 @@
           <p:nvPr/>
         </p:nvPicPr>
         <p:blipFill>
-          <a:blip xmlns:r="http://schemas.openxmlformats.org/officeDocument/2006/relationships" xmlns:a="http://schemas.openxmlformats.org/drawingml/2006/main" r:embed="R521a821b86174aa6"/>
+          <a:blip xmlns:r="http://schemas.openxmlformats.org/officeDocument/2006/relationships" xmlns:a="http://schemas.openxmlformats.org/drawingml/2006/main" r:embed="R9eb6e8f13adf44ea"/>
           <a:stretch xmlns:a="http://schemas.openxmlformats.org/drawingml/2006/main">
             <a:fillRect l="0" t="0" r="0" b="0"/>
           </a:stretch>
@@ -2888,7 +2989,7 @@
           <p:nvPr/>
         </p:nvPicPr>
         <p:blipFill>
-          <a:blip xmlns:r="http://schemas.openxmlformats.org/officeDocument/2006/relationships" xmlns:a="http://schemas.openxmlformats.org/drawingml/2006/main" r:embed="R810444e1838a45ec">
+          <a:blip xmlns:r="http://schemas.openxmlformats.org/officeDocument/2006/relationships" xmlns:a="http://schemas.openxmlformats.org/drawingml/2006/main" r:embed="R3d4bbcd1a3cd4a41">
             <a:duotone>
               <a:prstClr val="black"/>
               <a:schemeClr val="accent1">
@@ -3055,7 +3156,7 @@
           <p:nvPr/>
         </p:nvPicPr>
         <p:blipFill rotWithShape="1">
-          <a:blip xmlns:r="http://schemas.openxmlformats.org/officeDocument/2006/relationships" xmlns:a="http://schemas.openxmlformats.org/drawingml/2006/main" r:embed="R6d5181a1c08d46c4">
+          <a:blip xmlns:r="http://schemas.openxmlformats.org/officeDocument/2006/relationships" xmlns:a="http://schemas.openxmlformats.org/drawingml/2006/main" r:embed="R21fd4c63f4ae48bb">
             <a:alphaModFix amt="20000"/>
             <a:duotone>
               <a:schemeClr val="accent4">
@@ -3153,10 +3254,10 @@
   </p:cSld>
   <p:clrMap bg1="lt1" tx1="dk1" bg2="lt2" tx2="dk2" accent1="accent1" accent2="accent2" accent3="accent3" accent4="accent4" accent5="accent5" accent6="accent6" hlink="hlink" folHlink="folHlink"/>
   <p:sldLayoutIdLst>
-    <p:sldLayoutId xmlns:r="http://schemas.openxmlformats.org/officeDocument/2006/relationships" id="2147483649" r:id="Rd17c2e73286f41a4"/>
-    <p:sldLayoutId xmlns:r="http://schemas.openxmlformats.org/officeDocument/2006/relationships" id="2147483650" r:id="Rf0a2d75779044a8f"/>
-    <p:sldLayoutId xmlns:r="http://schemas.openxmlformats.org/officeDocument/2006/relationships" id="2147483651" r:id="R84c8029bf03f41c4"/>
-    <p:sldLayoutId xmlns:r="http://schemas.openxmlformats.org/officeDocument/2006/relationships" id="2147483652" r:id="R8ca82254d4f74843"/>
+    <p:sldLayoutId xmlns:r="http://schemas.openxmlformats.org/officeDocument/2006/relationships" id="2147483649" r:id="R27e04f4875ed4dc3"/>
+    <p:sldLayoutId xmlns:r="http://schemas.openxmlformats.org/officeDocument/2006/relationships" id="2147483650" r:id="Rcbc047b8167c4ddf"/>
+    <p:sldLayoutId xmlns:r="http://schemas.openxmlformats.org/officeDocument/2006/relationships" id="2147483651" r:id="Rb896cec120954b4e"/>
+    <p:sldLayoutId xmlns:r="http://schemas.openxmlformats.org/officeDocument/2006/relationships" id="2147483652" r:id="R41b5be3defaa4c30"/>
   </p:sldLayoutIdLst>
   <p:hf hdr="0" ftr="0" dt="0"/>
   <p:txStyles>
@@ -3689,120 +3790,6 @@
       </p:grpSpPr>
       <p:sp>
         <p:nvSpPr>
-          <p:cNvPr id="3" name="内容占位符 2">
-            <a:extLst xmlns:a="http://schemas.openxmlformats.org/drawingml/2006/main">
-              <a:ext uri="{FF2B5EF4-FFF2-40B4-BE49-F238E27FC236}">
-                <a16:creationId xmlns:a16="http://schemas.microsoft.com/office/drawing/2014/main" id="{D1D30E0E-D2D5-4C08-A919-2A1C2D5A8D02}"/>
-              </a:ext>
-            </a:extLst>
-          </p:cNvPr>
-          <p:cNvSpPr>
-            <a:spLocks xmlns:a="http://schemas.openxmlformats.org/drawingml/2006/main" noGrp="1"/>
-          </p:cNvSpPr>
-          <p:nvPr>
-            <p:ph idx="10"/>
-          </p:nvPr>
-        </p:nvSpPr>
-        <p:spPr>
-          <a:xfrm xmlns:a="http://schemas.openxmlformats.org/drawingml/2006/main">
-            <a:off x="1200150" y="3067050"/>
-            <a:ext cx="9791700" cy="2324100"/>
-          </a:xfrm>
-        </p:spPr>
-        <p:txBody>
-          <a:bodyPr xmlns:a="http://schemas.openxmlformats.org/drawingml/2006/main" lIns="0" tIns="0" rIns="0" bIns="0" anchor="ctr"/>
-          <a:lstStyle xmlns:a="http://schemas.openxmlformats.org/drawingml/2006/main"/>
-          <a:p xmlns:a="http://schemas.openxmlformats.org/drawingml/2006/main">
-            <a:pPr algn="ctr">
-              <a:lnSpc>
-                <a:spcPct val="122000"/>
-              </a:lnSpc>
-              <a:buNone/>
-            </a:pPr>
-            <a:r>
-              <a:rPr sz="1800" b="1">
-                <a:solidFill>
-                  <a:srgbClr val="18354E"/>
-                </a:solidFill>
-                <a:latin typeface="Microsoft YaHei"/>
-                <a:ea typeface="Microsoft YaHei"/>
-                <a:cs typeface="Microsoft YaHei"/>
-              </a:rPr>
-              <a:t>第 14 课初稿 → 同伴按 rubric 质询 → 作者记录回应 → 第 16 课论证门</a:t>
-            </a:r>
-            <a:endParaRPr>
-              <a:latin typeface="+mn-ea"/>
-              <a:ea typeface="+mn-ea"/>
-              <a:cs typeface="+mn-ea"/>
-            </a:endParaRPr>
-          </a:p>
-          <a:p xmlns:a="http://schemas.openxmlformats.org/drawingml/2006/main">
-            <a:r>
-              <a:rPr>
-                <a:latin typeface="+mn-ea"/>
-                <a:ea typeface="+mn-ea"/>
-                <a:cs typeface="+mn-ea"/>
-              </a:rPr>
-              <a:t/>
-            </a:r>
-            <a:endParaRPr>
-              <a:latin typeface="+mn-ea"/>
-              <a:ea typeface="+mn-ea"/>
-              <a:cs typeface="+mn-ea"/>
-            </a:endParaRPr>
-          </a:p>
-          <a:p xmlns:a="http://schemas.openxmlformats.org/drawingml/2006/main">
-            <a:pPr algn="ctr">
-              <a:lnSpc>
-                <a:spcPct val="122000"/>
-              </a:lnSpc>
-              <a:buNone/>
-            </a:pPr>
-            <a:r>
-              <a:rPr sz="1800" b="1">
-                <a:solidFill>
-                  <a:srgbClr val="18354E"/>
-                </a:solidFill>
-                <a:latin typeface="Microsoft YaHei"/>
-                <a:ea typeface="Microsoft YaHei"/>
-                <a:cs typeface="Microsoft YaHei"/>
-              </a:rPr>
-              <a:t>形成性预检｜本课不正式提交｜作者保留最终决定权</a:t>
-            </a:r>
-            <a:endParaRPr>
-              <a:latin typeface="+mn-ea"/>
-              <a:ea typeface="+mn-ea"/>
-              <a:cs typeface="+mn-ea"/>
-            </a:endParaRPr>
-          </a:p>
-          <a:p xmlns:a="http://schemas.openxmlformats.org/drawingml/2006/main">
-            <a:pPr algn="ctr">
-              <a:lnSpc>
-                <a:spcPct val="122000"/>
-              </a:lnSpc>
-              <a:buNone/>
-            </a:pPr>
-            <a:r>
-              <a:rPr sz="1800" b="1">
-                <a:solidFill>
-                  <a:srgbClr val="18354E"/>
-                </a:solidFill>
-                <a:latin typeface="Microsoft YaHei"/>
-                <a:ea typeface="Microsoft YaHei"/>
-                <a:cs typeface="Microsoft YaHei"/>
-              </a:rPr>
-              <a:t>第十五讲｜阶段八：回写、评审与表达</a:t>
-            </a:r>
-            <a:endParaRPr>
-              <a:latin typeface="+mn-ea"/>
-              <a:ea typeface="+mn-ea"/>
-              <a:cs typeface="+mn-ea"/>
-            </a:endParaRPr>
-          </a:p>
-        </p:txBody>
-      </p:sp>
-      <p:sp>
-        <p:nvSpPr>
           <p:cNvPr id="2" name="矩形 11">
             <a:extLst xmlns:a="http://schemas.openxmlformats.org/drawingml/2006/main">
               <a:ext uri="{FF2B5EF4-FFF2-40B4-BE49-F238E27FC236}">
@@ -3817,27 +3804,27 @@
         </p:nvSpPr>
         <p:spPr>
           <a:xfrm xmlns:a="http://schemas.openxmlformats.org/drawingml/2006/main">
-            <a:off x="1000125" y="1219200"/>
-            <a:ext cx="10191750" cy="1581150"/>
+            <a:off x="1143000" y="1790700"/>
+            <a:ext cx="9906000" cy="1524000"/>
           </a:xfrm>
           <a:prstGeom xmlns:a="http://schemas.openxmlformats.org/drawingml/2006/main" prst="rect">
             <a:avLst/>
           </a:prstGeom>
         </p:spPr>
         <p:txBody>
-          <a:bodyPr xmlns:a="http://schemas.openxmlformats.org/drawingml/2006/main" lIns="0" tIns="0" rIns="0" bIns="0" anchor="ctr">
+          <a:bodyPr xmlns:a="http://schemas.openxmlformats.org/drawingml/2006/main" lIns="76200" tIns="38100" rIns="76200" bIns="38100" anchor="ctr">
             <a:spAutoFit/>
           </a:bodyPr>
           <a:lstStyle xmlns:a="http://schemas.openxmlformats.org/drawingml/2006/main"/>
           <a:p xmlns:a="http://schemas.openxmlformats.org/drawingml/2006/main">
             <a:pPr algn="ctr">
               <a:lnSpc>
-                <a:spcPct val="110000"/>
-              </a:lnSpc>
-              <a:buNone/>
-            </a:pPr>
-            <a:r>
-              <a:rPr sz="3000" b="1">
+                <a:spcPct val="112000"/>
+              </a:lnSpc>
+              <a:buNone/>
+            </a:pPr>
+            <a:r>
+              <a:rPr sz="3150" b="1">
                 <a:solidFill>
                   <a:srgbClr val="C8161E"/>
                 </a:solidFill>
@@ -3845,7 +3832,7 @@
                 <a:ea typeface="Microsoft YaHei"/>
                 <a:cs typeface="Microsoft YaHei"/>
               </a:rPr>
-              <a:t>同行评审、论证门预检与修改</a:t>
+              <a:t>第15讲 同行评审、论证门预检与修改工作坊</a:t>
             </a:r>
             <a:endParaRPr sz="4000" b="1" kern="0" spc="20">
               <a:solidFill>
@@ -6612,17 +6599,17 @@
           </a:xfrm>
         </p:spPr>
         <p:txBody>
-          <a:bodyPr xmlns:a="http://schemas.openxmlformats.org/drawingml/2006/main" lIns="76200" tIns="0" rIns="76200" bIns="0" anchor="ctr"/>
+          <a:bodyPr xmlns:a="http://schemas.openxmlformats.org/drawingml/2006/main" lIns="76200" tIns="38100" rIns="76200" bIns="38100" anchor="ctr"/>
           <a:lstStyle xmlns:a="http://schemas.openxmlformats.org/drawingml/2006/main"/>
           <a:p xmlns:a="http://schemas.openxmlformats.org/drawingml/2006/main">
             <a:pPr algn="l">
               <a:lnSpc>
-                <a:spcPct val="110000"/>
-              </a:lnSpc>
-              <a:buNone/>
-            </a:pPr>
-            <a:r>
-              <a:rPr sz="2175" b="1">
+                <a:spcPct val="112000"/>
+              </a:lnSpc>
+              <a:buNone/>
+            </a:pPr>
+            <a:r>
+              <a:rPr sz="2250" b="1">
                 <a:solidFill>
                   <a:srgbClr val="FFFFFF"/>
                 </a:solidFill>
@@ -6630,7 +6617,7 @@
                 <a:ea typeface="Microsoft YaHei"/>
                 <a:cs typeface="Microsoft YaHei"/>
               </a:rPr>
-              <a:t>先修致命项，再带缺口进入第 16 课</a:t>
+              <a:t>本讲知识点总结</a:t>
             </a:r>
             <a:endParaRPr/>
           </a:p>
@@ -6666,30 +6653,30 @@
       </p:sp>
       <p:sp>
         <p:nvSpPr>
-          <p:cNvPr id="6" name="p13a0">
-            <a:extLst xmlns:a="http://schemas.openxmlformats.org/drawingml/2006/main">
-              <a:ext uri="{FF2B5EF4-FFF2-40B4-BE49-F238E27FC236}">
-                <a16:creationId xmlns:a16="http://schemas.microsoft.com/office/drawing/2014/main" id="{0ACCED3C-B0D9-46E0-8B5E-AD0991299586}"/>
-              </a:ext>
-            </a:extLst>
-          </p:cNvPr>
-          <p:cNvSpPr>
-            <a:spLocks xmlns:a="http://schemas.openxmlformats.org/drawingml/2006/main" noGrp="1"/>
-          </p:cNvSpPr>
-          <p:nvPr/>
-        </p:nvSpPr>
-        <p:spPr>
-          <a:xfrm xmlns:a="http://schemas.openxmlformats.org/drawingml/2006/main">
-            <a:off x="590550" y="1200150"/>
-            <a:ext cx="1352550" cy="609600"/>
+          <p:cNvPr id="6" name="summary-15-number-0">
+            <a:extLst xmlns:a="http://schemas.openxmlformats.org/drawingml/2006/main">
+              <a:ext uri="{FF2B5EF4-FFF2-40B4-BE49-F238E27FC236}">
+                <a16:creationId xmlns:a16="http://schemas.microsoft.com/office/drawing/2014/main" id="{08BFDED3-6B8F-4F41-BE30-337E13132A15}"/>
+              </a:ext>
+            </a:extLst>
+          </p:cNvPr>
+          <p:cNvSpPr>
+            <a:spLocks xmlns:a="http://schemas.openxmlformats.org/drawingml/2006/main" noGrp="1"/>
+          </p:cNvSpPr>
+          <p:nvPr/>
+        </p:nvSpPr>
+        <p:spPr>
+          <a:xfrm xmlns:a="http://schemas.openxmlformats.org/drawingml/2006/main">
+            <a:off x="457200" y="1219200"/>
+            <a:ext cx="476250" cy="476250"/>
           </a:xfrm>
           <a:prstGeom xmlns:a="http://schemas.openxmlformats.org/drawingml/2006/main" prst="roundRect">
             <a:avLst>
-              <a:gd name="adj" fmla="val 12500"/>
+              <a:gd name="adj" fmla="val 16000"/>
             </a:avLst>
           </a:prstGeom>
           <a:solidFill xmlns:a="http://schemas.openxmlformats.org/drawingml/2006/main">
-            <a:srgbClr val="C8161E"/>
+            <a:srgbClr val="18354E"/>
           </a:solidFill>
           <a:ln xmlns:a="http://schemas.openxmlformats.org/drawingml/2006/main" w="0">
             <a:noFill/>
@@ -6702,7 +6689,7 @@
           <a:p xmlns:a="http://schemas.openxmlformats.org/drawingml/2006/main">
             <a:pPr algn="ctr">
               <a:lnSpc>
-                <a:spcPct val="110000"/>
+                <a:spcPct val="112000"/>
               </a:lnSpc>
               <a:buNone/>
               <a:defRPr sz="1500" b="1">
@@ -6716,100 +6703,41 @@
                 <a:solidFill>
                   <a:srgbClr val="FFFFFF"/>
                 </a:solidFill>
-                <a:latin typeface="Microsoft YaHei"/>
-                <a:ea typeface="Microsoft YaHei"/>
-                <a:cs typeface="Microsoft YaHei"/>
-              </a:rPr>
-              <a:t>致命</a:t>
-            </a:r>
-          </a:p>
-        </p:txBody>
-      </p:sp>
-      <p:sp>
-        <p:nvSpPr>
-          <p:cNvPr id="7" name="p13b0">
-            <a:extLst xmlns:a="http://schemas.openxmlformats.org/drawingml/2006/main">
-              <a:ext uri="{FF2B5EF4-FFF2-40B4-BE49-F238E27FC236}">
-                <a16:creationId xmlns:a16="http://schemas.microsoft.com/office/drawing/2014/main" id="{911927D7-3D5D-4C8C-9890-6545BC83CC70}"/>
-              </a:ext>
-            </a:extLst>
-          </p:cNvPr>
-          <p:cNvSpPr>
-            <a:spLocks xmlns:a="http://schemas.openxmlformats.org/drawingml/2006/main" noGrp="1"/>
-          </p:cNvSpPr>
-          <p:nvPr/>
-        </p:nvSpPr>
-        <p:spPr>
-          <a:xfrm xmlns:a="http://schemas.openxmlformats.org/drawingml/2006/main">
-            <a:off x="2114550" y="1200150"/>
-            <a:ext cx="4095750" cy="609600"/>
-          </a:xfrm>
-          <a:prstGeom xmlns:a="http://schemas.openxmlformats.org/drawingml/2006/main" prst="rect">
-            <a:avLst/>
-          </a:prstGeom>
-          <a:solidFill xmlns:a="http://schemas.openxmlformats.org/drawingml/2006/main">
-            <a:srgbClr val="F8E9EA"/>
-          </a:solidFill>
-          <a:ln xmlns:a="http://schemas.openxmlformats.org/drawingml/2006/main" w="0">
-            <a:noFill/>
-            <a:prstDash val="solid"/>
-          </a:ln>
-        </p:spPr>
-        <p:txBody>
-          <a:bodyPr xmlns:a="http://schemas.openxmlformats.org/drawingml/2006/main" lIns="76200" tIns="38100" rIns="76200" bIns="38100" anchor="ctr"/>
-          <a:lstStyle xmlns:a="http://schemas.openxmlformats.org/drawingml/2006/main"/>
-          <a:p xmlns:a="http://schemas.openxmlformats.org/drawingml/2006/main">
-            <a:pPr algn="l">
-              <a:lnSpc>
-                <a:spcPct val="110000"/>
-              </a:lnSpc>
-              <a:buNone/>
-              <a:defRPr sz="1500" b="1">
-                <a:solidFill>
-                  <a:srgbClr val="C8161E"/>
-                </a:solidFill>
-              </a:defRPr>
-            </a:pPr>
-            <a:r>
-              <a:rPr sz="1500" b="1">
-                <a:solidFill>
-                  <a:srgbClr val="C8161E"/>
-                </a:solidFill>
-                <a:latin typeface="Microsoft YaHei"/>
-                <a:ea typeface="Microsoft YaHei"/>
-                <a:cs typeface="Microsoft YaHei"/>
-              </a:rPr>
-              <a:t>论证门不满足；第16课前修复</a:t>
-            </a:r>
-          </a:p>
-        </p:txBody>
-      </p:sp>
-      <p:sp>
-        <p:nvSpPr>
-          <p:cNvPr id="8" name="p13a1">
-            <a:extLst xmlns:a="http://schemas.openxmlformats.org/drawingml/2006/main">
-              <a:ext uri="{FF2B5EF4-FFF2-40B4-BE49-F238E27FC236}">
-                <a16:creationId xmlns:a16="http://schemas.microsoft.com/office/drawing/2014/main" id="{9A2F9FF1-AB89-443F-80EC-E86255729706}"/>
-              </a:ext>
-            </a:extLst>
-          </p:cNvPr>
-          <p:cNvSpPr>
-            <a:spLocks xmlns:a="http://schemas.openxmlformats.org/drawingml/2006/main" noGrp="1"/>
-          </p:cNvSpPr>
-          <p:nvPr/>
-        </p:nvSpPr>
-        <p:spPr>
-          <a:xfrm xmlns:a="http://schemas.openxmlformats.org/drawingml/2006/main">
-            <a:off x="590550" y="2305050"/>
-            <a:ext cx="1352550" cy="609600"/>
+                <a:latin typeface="Arial"/>
+                <a:ea typeface="Arial"/>
+                <a:cs typeface="Arial"/>
+              </a:rPr>
+              <a:t>1</a:t>
+            </a:r>
+          </a:p>
+        </p:txBody>
+      </p:sp>
+      <p:sp>
+        <p:nvSpPr>
+          <p:cNvPr id="7" name="summary-15-heading-0">
+            <a:extLst xmlns:a="http://schemas.openxmlformats.org/drawingml/2006/main">
+              <a:ext uri="{FF2B5EF4-FFF2-40B4-BE49-F238E27FC236}">
+                <a16:creationId xmlns:a16="http://schemas.microsoft.com/office/drawing/2014/main" id="{D73B44A1-9F57-4786-B62A-F0543BD2190D}"/>
+              </a:ext>
+            </a:extLst>
+          </p:cNvPr>
+          <p:cNvSpPr>
+            <a:spLocks xmlns:a="http://schemas.openxmlformats.org/drawingml/2006/main" noGrp="1"/>
+          </p:cNvSpPr>
+          <p:nvPr/>
+        </p:nvSpPr>
+        <p:spPr>
+          <a:xfrm xmlns:a="http://schemas.openxmlformats.org/drawingml/2006/main">
+            <a:off x="1028700" y="1162050"/>
+            <a:ext cx="2152650" cy="590550"/>
           </a:xfrm>
           <a:prstGeom xmlns:a="http://schemas.openxmlformats.org/drawingml/2006/main" prst="roundRect">
             <a:avLst>
-              <a:gd name="adj" fmla="val 12500"/>
+              <a:gd name="adj" fmla="val 12903"/>
             </a:avLst>
           </a:prstGeom>
           <a:solidFill xmlns:a="http://schemas.openxmlformats.org/drawingml/2006/main">
-            <a:srgbClr val="A86C12"/>
+            <a:srgbClr val="E8F0F6"/>
           </a:solidFill>
           <a:ln xmlns:a="http://schemas.openxmlformats.org/drawingml/2006/main" w="0">
             <a:noFill/>
@@ -6822,117 +6750,60 @@
           <a:p xmlns:a="http://schemas.openxmlformats.org/drawingml/2006/main">
             <a:pPr algn="ctr">
               <a:lnSpc>
-                <a:spcPct val="110000"/>
-              </a:lnSpc>
-              <a:buNone/>
-              <a:defRPr sz="1500" b="1">
-                <a:solidFill>
-                  <a:srgbClr val="FFFFFF"/>
-                </a:solidFill>
-              </a:defRPr>
-            </a:pPr>
-            <a:r>
-              <a:rPr sz="1500" b="1">
-                <a:solidFill>
-                  <a:srgbClr val="FFFFFF"/>
-                </a:solidFill>
-                <a:latin typeface="Microsoft YaHei"/>
-                <a:ea typeface="Microsoft YaHei"/>
-                <a:cs typeface="Microsoft YaHei"/>
-              </a:rPr>
-              <a:t>重要</a:t>
-            </a:r>
-          </a:p>
-        </p:txBody>
-      </p:sp>
-      <p:sp>
-        <p:nvSpPr>
-          <p:cNvPr id="9" name="p13b1">
-            <a:extLst xmlns:a="http://schemas.openxmlformats.org/drawingml/2006/main">
-              <a:ext uri="{FF2B5EF4-FFF2-40B4-BE49-F238E27FC236}">
-                <a16:creationId xmlns:a16="http://schemas.microsoft.com/office/drawing/2014/main" id="{55A71454-96A0-429A-A3DD-C8CC34E4D81D}"/>
-              </a:ext>
-            </a:extLst>
-          </p:cNvPr>
-          <p:cNvSpPr>
-            <a:spLocks xmlns:a="http://schemas.openxmlformats.org/drawingml/2006/main" noGrp="1"/>
-          </p:cNvSpPr>
-          <p:nvPr/>
-        </p:nvSpPr>
-        <p:spPr>
-          <a:xfrm xmlns:a="http://schemas.openxmlformats.org/drawingml/2006/main">
-            <a:off x="2114550" y="2305050"/>
-            <a:ext cx="4095750" cy="609600"/>
-          </a:xfrm>
-          <a:prstGeom xmlns:a="http://schemas.openxmlformats.org/drawingml/2006/main" prst="rect">
-            <a:avLst/>
-          </a:prstGeom>
-          <a:solidFill xmlns:a="http://schemas.openxmlformats.org/drawingml/2006/main">
-            <a:srgbClr val="FAF0DD"/>
-          </a:solidFill>
-          <a:ln xmlns:a="http://schemas.openxmlformats.org/drawingml/2006/main" w="0">
-            <a:noFill/>
-            <a:prstDash val="solid"/>
-          </a:ln>
-        </p:spPr>
-        <p:txBody>
-          <a:bodyPr xmlns:a="http://schemas.openxmlformats.org/drawingml/2006/main" lIns="76200" tIns="38100" rIns="76200" bIns="38100" anchor="ctr"/>
-          <a:lstStyle xmlns:a="http://schemas.openxmlformats.org/drawingml/2006/main"/>
-          <a:p xmlns:a="http://schemas.openxmlformats.org/drawingml/2006/main">
-            <a:pPr algn="l">
-              <a:lnSpc>
-                <a:spcPct val="110000"/>
-              </a:lnSpc>
-              <a:buNone/>
-              <a:defRPr sz="1500" b="1">
-                <a:solidFill>
-                  <a:srgbClr val="A86C12"/>
-                </a:solidFill>
-              </a:defRPr>
-            </a:pPr>
-            <a:r>
-              <a:rPr sz="1500" b="1">
-                <a:solidFill>
-                  <a:srgbClr val="A86C12"/>
-                </a:solidFill>
-                <a:latin typeface="Microsoft YaHei"/>
-                <a:ea typeface="Microsoft YaHei"/>
-                <a:cs typeface="Microsoft YaHei"/>
-              </a:rPr>
-              <a:t>有缺口；尽量修复或标待验证</a:t>
-            </a:r>
-          </a:p>
-        </p:txBody>
-      </p:sp>
-      <p:sp>
-        <p:nvSpPr>
-          <p:cNvPr id="10" name="p13a2">
-            <a:extLst xmlns:a="http://schemas.openxmlformats.org/drawingml/2006/main">
-              <a:ext uri="{FF2B5EF4-FFF2-40B4-BE49-F238E27FC236}">
-                <a16:creationId xmlns:a16="http://schemas.microsoft.com/office/drawing/2014/main" id="{E5F33EFA-0265-4FE6-83A4-E491F86F540A}"/>
-              </a:ext>
-            </a:extLst>
-          </p:cNvPr>
-          <p:cNvSpPr>
-            <a:spLocks xmlns:a="http://schemas.openxmlformats.org/drawingml/2006/main" noGrp="1"/>
-          </p:cNvSpPr>
-          <p:nvPr/>
-        </p:nvSpPr>
-        <p:spPr>
-          <a:xfrm xmlns:a="http://schemas.openxmlformats.org/drawingml/2006/main">
-            <a:off x="590550" y="3409950"/>
-            <a:ext cx="1352550" cy="609600"/>
+                <a:spcPct val="112000"/>
+              </a:lnSpc>
+              <a:buNone/>
+              <a:defRPr sz="1725" b="1">
+                <a:solidFill>
+                  <a:srgbClr val="18354E"/>
+                </a:solidFill>
+              </a:defRPr>
+            </a:pPr>
+            <a:r>
+              <a:rPr sz="1725" b="1">
+                <a:solidFill>
+                  <a:srgbClr val="18354E"/>
+                </a:solidFill>
+                <a:latin typeface="Microsoft YaHei"/>
+                <a:ea typeface="Microsoft YaHei"/>
+                <a:cs typeface="Microsoft YaHei"/>
+              </a:rPr>
+              <a:t>证据化评审</a:t>
+            </a:r>
+          </a:p>
+        </p:txBody>
+      </p:sp>
+      <p:sp>
+        <p:nvSpPr>
+          <p:cNvPr id="8" name="summary-15-detail-0">
+            <a:extLst xmlns:a="http://schemas.openxmlformats.org/drawingml/2006/main">
+              <a:ext uri="{FF2B5EF4-FFF2-40B4-BE49-F238E27FC236}">
+                <a16:creationId xmlns:a16="http://schemas.microsoft.com/office/drawing/2014/main" id="{1B29A45B-CB0A-4BDD-9720-60961932A037}"/>
+              </a:ext>
+            </a:extLst>
+          </p:cNvPr>
+          <p:cNvSpPr>
+            <a:spLocks xmlns:a="http://schemas.openxmlformats.org/drawingml/2006/main" noGrp="1"/>
+          </p:cNvSpPr>
+          <p:nvPr/>
+        </p:nvSpPr>
+        <p:spPr>
+          <a:xfrm xmlns:a="http://schemas.openxmlformats.org/drawingml/2006/main">
+            <a:off x="457200" y="2095500"/>
+            <a:ext cx="2724150" cy="1676400"/>
           </a:xfrm>
           <a:prstGeom xmlns:a="http://schemas.openxmlformats.org/drawingml/2006/main" prst="roundRect">
             <a:avLst>
-              <a:gd name="adj" fmla="val 12500"/>
+              <a:gd name="adj" fmla="val 4545"/>
             </a:avLst>
           </a:prstGeom>
           <a:solidFill xmlns:a="http://schemas.openxmlformats.org/drawingml/2006/main">
-            <a:srgbClr val="28745A"/>
-          </a:solidFill>
-          <a:ln xmlns:a="http://schemas.openxmlformats.org/drawingml/2006/main" w="0">
-            <a:noFill/>
+            <a:srgbClr val="FFFFFF"/>
+          </a:solidFill>
+          <a:ln xmlns:a="http://schemas.openxmlformats.org/drawingml/2006/main" w="9525">
+            <a:solidFill>
+              <a:srgbClr val="D6DDE2"/>
+            </a:solidFill>
             <a:prstDash val="solid"/>
           </a:ln>
         </p:spPr>
@@ -6942,145 +6813,55 @@
           <a:p xmlns:a="http://schemas.openxmlformats.org/drawingml/2006/main">
             <a:pPr algn="ctr">
               <a:lnSpc>
-                <a:spcPct val="110000"/>
+                <a:spcPct val="116000"/>
               </a:lnSpc>
               <a:buNone/>
               <a:defRPr sz="1500" b="1">
                 <a:solidFill>
-                  <a:srgbClr val="FFFFFF"/>
+                  <a:srgbClr val="263746"/>
                 </a:solidFill>
               </a:defRPr>
             </a:pPr>
             <a:r>
               <a:rPr sz="1500" b="1">
                 <a:solidFill>
-                  <a:srgbClr val="FFFFFF"/>
-                </a:solidFill>
-                <a:latin typeface="Microsoft YaHei"/>
-                <a:ea typeface="Microsoft YaHei"/>
-                <a:cs typeface="Microsoft YaHei"/>
-              </a:rPr>
-              <a:t>表达</a:t>
-            </a:r>
-          </a:p>
-        </p:txBody>
-      </p:sp>
-      <p:sp>
-        <p:nvSpPr>
-          <p:cNvPr id="11" name="p13b2">
-            <a:extLst xmlns:a="http://schemas.openxmlformats.org/drawingml/2006/main">
-              <a:ext uri="{FF2B5EF4-FFF2-40B4-BE49-F238E27FC236}">
-                <a16:creationId xmlns:a16="http://schemas.microsoft.com/office/drawing/2014/main" id="{FB54A1CB-0794-46DA-A195-975F965B17F8}"/>
-              </a:ext>
-            </a:extLst>
-          </p:cNvPr>
-          <p:cNvSpPr>
-            <a:spLocks xmlns:a="http://schemas.openxmlformats.org/drawingml/2006/main" noGrp="1"/>
-          </p:cNvSpPr>
-          <p:nvPr/>
-        </p:nvSpPr>
-        <p:spPr>
-          <a:xfrm xmlns:a="http://schemas.openxmlformats.org/drawingml/2006/main">
-            <a:off x="2114550" y="3409950"/>
-            <a:ext cx="4095750" cy="609600"/>
-          </a:xfrm>
-          <a:prstGeom xmlns:a="http://schemas.openxmlformats.org/drawingml/2006/main" prst="rect">
-            <a:avLst/>
-          </a:prstGeom>
-          <a:solidFill xmlns:a="http://schemas.openxmlformats.org/drawingml/2006/main">
-            <a:srgbClr val="E7F2ED"/>
-          </a:solidFill>
-          <a:ln xmlns:a="http://schemas.openxmlformats.org/drawingml/2006/main" w="0">
-            <a:noFill/>
-            <a:prstDash val="solid"/>
-          </a:ln>
-        </p:spPr>
-        <p:txBody>
-          <a:bodyPr xmlns:a="http://schemas.openxmlformats.org/drawingml/2006/main" lIns="76200" tIns="38100" rIns="76200" bIns="38100" anchor="ctr"/>
-          <a:lstStyle xmlns:a="http://schemas.openxmlformats.org/drawingml/2006/main"/>
-          <a:p xmlns:a="http://schemas.openxmlformats.org/drawingml/2006/main">
-            <a:pPr algn="l">
-              <a:lnSpc>
-                <a:spcPct val="110000"/>
-              </a:lnSpc>
-              <a:buNone/>
-              <a:defRPr sz="1500" b="1">
-                <a:solidFill>
-                  <a:srgbClr val="28745A"/>
-                </a:solidFill>
-              </a:defRPr>
-            </a:pPr>
-            <a:r>
-              <a:rPr sz="1500" b="1">
-                <a:solidFill>
-                  <a:srgbClr val="28745A"/>
-                </a:solidFill>
-                <a:latin typeface="Microsoft YaHei"/>
-                <a:ea typeface="Microsoft YaHei"/>
-                <a:cs typeface="Microsoft YaHei"/>
-              </a:rPr>
-              <a:t>论证成立；展示前打磨</a:t>
-            </a:r>
-          </a:p>
-        </p:txBody>
-      </p:sp>
-      <p:sp>
-        <p:nvSpPr>
-          <p:cNvPr id="12" name="p13mid">
-            <a:extLst xmlns:a="http://schemas.openxmlformats.org/drawingml/2006/main">
-              <a:ext uri="{FF2B5EF4-FFF2-40B4-BE49-F238E27FC236}">
-                <a16:creationId xmlns:a16="http://schemas.microsoft.com/office/drawing/2014/main" id="{C1E6FDC3-F436-4D8D-BF07-9B0F03608DC6}"/>
-              </a:ext>
-            </a:extLst>
-          </p:cNvPr>
-          <p:cNvSpPr>
-            <a:spLocks xmlns:a="http://schemas.openxmlformats.org/drawingml/2006/main" noGrp="1"/>
-          </p:cNvSpPr>
-          <p:nvPr/>
-        </p:nvSpPr>
-        <p:spPr>
-          <a:xfrm xmlns:a="http://schemas.openxmlformats.org/drawingml/2006/main" rot="5400000">
-            <a:off x="4914900" y="2771775"/>
-            <a:ext cx="3314700" cy="19050"/>
-          </a:xfrm>
-          <a:prstGeom xmlns:a="http://schemas.openxmlformats.org/drawingml/2006/main" prst="rect">
-            <a:avLst/>
-          </a:prstGeom>
-          <a:solidFill xmlns:a="http://schemas.openxmlformats.org/drawingml/2006/main">
-            <a:srgbClr val="D6DDE2"/>
-          </a:solidFill>
-          <a:ln xmlns:a="http://schemas.openxmlformats.org/drawingml/2006/main" w="0">
-            <a:noFill/>
-            <a:prstDash val="solid"/>
-          </a:ln>
-        </p:spPr>
-      </p:sp>
-      <p:sp>
-        <p:nvSpPr>
-          <p:cNvPr id="13" name="p13right">
-            <a:extLst xmlns:a="http://schemas.openxmlformats.org/drawingml/2006/main">
-              <a:ext uri="{FF2B5EF4-FFF2-40B4-BE49-F238E27FC236}">
-                <a16:creationId xmlns:a16="http://schemas.microsoft.com/office/drawing/2014/main" id="{FE29B9BD-9F98-4F85-B8F3-7CDAEDAB579B}"/>
-              </a:ext>
-            </a:extLst>
-          </p:cNvPr>
-          <p:cNvSpPr>
-            <a:spLocks xmlns:a="http://schemas.openxmlformats.org/drawingml/2006/main" noGrp="1"/>
-          </p:cNvSpPr>
-          <p:nvPr/>
-        </p:nvSpPr>
-        <p:spPr>
-          <a:xfrm xmlns:a="http://schemas.openxmlformats.org/drawingml/2006/main">
-            <a:off x="7181850" y="1104900"/>
-            <a:ext cx="4038600" cy="3143250"/>
+                  <a:srgbClr val="263746"/>
+                </a:solidFill>
+                <a:latin typeface="Microsoft YaHei"/>
+                <a:ea typeface="Microsoft YaHei"/>
+                <a:cs typeface="Microsoft YaHei"/>
+              </a:rPr>
+              <a:t>意见必须指向具体主张、证据、失败或门条件</a:t>
+            </a:r>
+          </a:p>
+        </p:txBody>
+      </p:sp>
+      <p:sp>
+        <p:nvSpPr>
+          <p:cNvPr id="9" name="summary-15-number-1">
+            <a:extLst xmlns:a="http://schemas.openxmlformats.org/drawingml/2006/main">
+              <a:ext uri="{FF2B5EF4-FFF2-40B4-BE49-F238E27FC236}">
+                <a16:creationId xmlns:a16="http://schemas.microsoft.com/office/drawing/2014/main" id="{915ECFD3-C86C-484E-877C-C2A29AF57444}"/>
+              </a:ext>
+            </a:extLst>
+          </p:cNvPr>
+          <p:cNvSpPr>
+            <a:spLocks xmlns:a="http://schemas.openxmlformats.org/drawingml/2006/main" noGrp="1"/>
+          </p:cNvSpPr>
+          <p:nvPr/>
+        </p:nvSpPr>
+        <p:spPr>
+          <a:xfrm xmlns:a="http://schemas.openxmlformats.org/drawingml/2006/main">
+            <a:off x="3371850" y="1219200"/>
+            <a:ext cx="476250" cy="476250"/>
           </a:xfrm>
           <a:prstGeom xmlns:a="http://schemas.openxmlformats.org/drawingml/2006/main" prst="roundRect">
             <a:avLst>
-              <a:gd name="adj" fmla="val 2424"/>
+              <a:gd name="adj" fmla="val 16000"/>
             </a:avLst>
           </a:prstGeom>
           <a:solidFill xmlns:a="http://schemas.openxmlformats.org/drawingml/2006/main">
-            <a:srgbClr val="E8F0F6"/>
+            <a:srgbClr val="28745A"/>
           </a:solidFill>
           <a:ln xmlns:a="http://schemas.openxmlformats.org/drawingml/2006/main" w="0">
             <a:noFill/>
@@ -7093,209 +6874,580 @@
           <a:p xmlns:a="http://schemas.openxmlformats.org/drawingml/2006/main">
             <a:pPr algn="ctr">
               <a:lnSpc>
-                <a:spcPct val="125000"/>
+                <a:spcPct val="112000"/>
+              </a:lnSpc>
+              <a:buNone/>
+              <a:defRPr sz="1500" b="1">
+                <a:solidFill>
+                  <a:srgbClr val="FFFFFF"/>
+                </a:solidFill>
+              </a:defRPr>
+            </a:pPr>
+            <a:r>
+              <a:rPr sz="1500" b="1">
+                <a:solidFill>
+                  <a:srgbClr val="FFFFFF"/>
+                </a:solidFill>
+                <a:latin typeface="Arial"/>
+                <a:ea typeface="Arial"/>
+                <a:cs typeface="Arial"/>
+              </a:rPr>
+              <a:t>2</a:t>
+            </a:r>
+          </a:p>
+        </p:txBody>
+      </p:sp>
+      <p:sp>
+        <p:nvSpPr>
+          <p:cNvPr id="10" name="summary-15-heading-1">
+            <a:extLst xmlns:a="http://schemas.openxmlformats.org/drawingml/2006/main">
+              <a:ext uri="{FF2B5EF4-FFF2-40B4-BE49-F238E27FC236}">
+                <a16:creationId xmlns:a16="http://schemas.microsoft.com/office/drawing/2014/main" id="{FA3ADD24-3B59-41ED-BA1C-3EDAF382D403}"/>
+              </a:ext>
+            </a:extLst>
+          </p:cNvPr>
+          <p:cNvSpPr>
+            <a:spLocks xmlns:a="http://schemas.openxmlformats.org/drawingml/2006/main" noGrp="1"/>
+          </p:cNvSpPr>
+          <p:nvPr/>
+        </p:nvSpPr>
+        <p:spPr>
+          <a:xfrm xmlns:a="http://schemas.openxmlformats.org/drawingml/2006/main">
+            <a:off x="3943350" y="1162050"/>
+            <a:ext cx="2152650" cy="590550"/>
+          </a:xfrm>
+          <a:prstGeom xmlns:a="http://schemas.openxmlformats.org/drawingml/2006/main" prst="roundRect">
+            <a:avLst>
+              <a:gd name="adj" fmla="val 12903"/>
+            </a:avLst>
+          </a:prstGeom>
+          <a:solidFill xmlns:a="http://schemas.openxmlformats.org/drawingml/2006/main">
+            <a:srgbClr val="E7F2ED"/>
+          </a:solidFill>
+          <a:ln xmlns:a="http://schemas.openxmlformats.org/drawingml/2006/main" w="0">
+            <a:noFill/>
+            <a:prstDash val="solid"/>
+          </a:ln>
+        </p:spPr>
+        <p:txBody>
+          <a:bodyPr xmlns:a="http://schemas.openxmlformats.org/drawingml/2006/main" lIns="76200" tIns="38100" rIns="76200" bIns="38100" anchor="ctr"/>
+          <a:lstStyle xmlns:a="http://schemas.openxmlformats.org/drawingml/2006/main"/>
+          <a:p xmlns:a="http://schemas.openxmlformats.org/drawingml/2006/main">
+            <a:pPr algn="ctr">
+              <a:lnSpc>
+                <a:spcPct val="112000"/>
               </a:lnSpc>
               <a:buNone/>
               <a:defRPr sz="1725" b="1">
                 <a:solidFill>
-                  <a:srgbClr val="18354E"/>
+                  <a:srgbClr val="28745A"/>
                 </a:solidFill>
               </a:defRPr>
             </a:pPr>
             <a:r>
               <a:rPr sz="1725" b="1">
                 <a:solidFill>
-                  <a:srgbClr val="18354E"/>
-                </a:solidFill>
-                <a:latin typeface="Microsoft YaHei"/>
-                <a:ea typeface="Microsoft YaHei"/>
-                <a:cs typeface="Microsoft YaHei"/>
-              </a:rPr>
-              <a:t>第 16 课合并检查</a:t>
-            </a:r>
-          </a:p>
-          <a:p xmlns:a="http://schemas.openxmlformats.org/drawingml/2006/main">
-            <a:r>
-              <a:t/>
-            </a:r>
-          </a:p>
+                  <a:srgbClr val="28745A"/>
+                </a:solidFill>
+                <a:latin typeface="Microsoft YaHei"/>
+                <a:ea typeface="Microsoft YaHei"/>
+                <a:cs typeface="Microsoft YaHei"/>
+              </a:rPr>
+              <a:t>作者回应</a:t>
+            </a:r>
+          </a:p>
+        </p:txBody>
+      </p:sp>
+      <p:sp>
+        <p:nvSpPr>
+          <p:cNvPr id="11" name="summary-15-detail-1">
+            <a:extLst xmlns:a="http://schemas.openxmlformats.org/drawingml/2006/main">
+              <a:ext uri="{FF2B5EF4-FFF2-40B4-BE49-F238E27FC236}">
+                <a16:creationId xmlns:a16="http://schemas.microsoft.com/office/drawing/2014/main" id="{C2C9E6F6-3CFD-46FE-AC9C-D0796117B9B6}"/>
+              </a:ext>
+            </a:extLst>
+          </p:cNvPr>
+          <p:cNvSpPr>
+            <a:spLocks xmlns:a="http://schemas.openxmlformats.org/drawingml/2006/main" noGrp="1"/>
+          </p:cNvSpPr>
+          <p:nvPr/>
+        </p:nvSpPr>
+        <p:spPr>
+          <a:xfrm xmlns:a="http://schemas.openxmlformats.org/drawingml/2006/main">
+            <a:off x="3371850" y="2095500"/>
+            <a:ext cx="2724150" cy="1676400"/>
+          </a:xfrm>
+          <a:prstGeom xmlns:a="http://schemas.openxmlformats.org/drawingml/2006/main" prst="roundRect">
+            <a:avLst>
+              <a:gd name="adj" fmla="val 4545"/>
+            </a:avLst>
+          </a:prstGeom>
+          <a:solidFill xmlns:a="http://schemas.openxmlformats.org/drawingml/2006/main">
+            <a:srgbClr val="FFFFFF"/>
+          </a:solidFill>
+          <a:ln xmlns:a="http://schemas.openxmlformats.org/drawingml/2006/main" w="9525">
+            <a:solidFill>
+              <a:srgbClr val="D6DDE2"/>
+            </a:solidFill>
+            <a:prstDash val="solid"/>
+          </a:ln>
+        </p:spPr>
+        <p:txBody>
+          <a:bodyPr xmlns:a="http://schemas.openxmlformats.org/drawingml/2006/main" lIns="76200" tIns="38100" rIns="76200" bIns="38100" anchor="ctr"/>
+          <a:lstStyle xmlns:a="http://schemas.openxmlformats.org/drawingml/2006/main"/>
           <a:p xmlns:a="http://schemas.openxmlformats.org/drawingml/2006/main">
             <a:pPr algn="ctr">
               <a:lnSpc>
-                <a:spcPct val="125000"/>
+                <a:spcPct val="116000"/>
+              </a:lnSpc>
+              <a:buNone/>
+              <a:defRPr sz="1500" b="1">
+                <a:solidFill>
+                  <a:srgbClr val="263746"/>
+                </a:solidFill>
+              </a:defRPr>
+            </a:pPr>
+            <a:r>
+              <a:rPr sz="1500" b="1">
+                <a:solidFill>
+                  <a:srgbClr val="263746"/>
+                </a:solidFill>
+                <a:latin typeface="Microsoft YaHei"/>
+                <a:ea typeface="Microsoft YaHei"/>
+                <a:cs typeface="Microsoft YaHei"/>
+              </a:rPr>
+              <a:t>记录采纳、拒绝或暂缓及理由，不以辩论替代修改</a:t>
+            </a:r>
+          </a:p>
+        </p:txBody>
+      </p:sp>
+      <p:sp>
+        <p:nvSpPr>
+          <p:cNvPr id="12" name="summary-15-number-2">
+            <a:extLst xmlns:a="http://schemas.openxmlformats.org/drawingml/2006/main">
+              <a:ext uri="{FF2B5EF4-FFF2-40B4-BE49-F238E27FC236}">
+                <a16:creationId xmlns:a16="http://schemas.microsoft.com/office/drawing/2014/main" id="{D03ED69B-7855-404D-A78A-83E823762999}"/>
+              </a:ext>
+            </a:extLst>
+          </p:cNvPr>
+          <p:cNvSpPr>
+            <a:spLocks xmlns:a="http://schemas.openxmlformats.org/drawingml/2006/main" noGrp="1"/>
+          </p:cNvSpPr>
+          <p:nvPr/>
+        </p:nvSpPr>
+        <p:spPr>
+          <a:xfrm xmlns:a="http://schemas.openxmlformats.org/drawingml/2006/main">
+            <a:off x="6286500" y="1219200"/>
+            <a:ext cx="476250" cy="476250"/>
+          </a:xfrm>
+          <a:prstGeom xmlns:a="http://schemas.openxmlformats.org/drawingml/2006/main" prst="roundRect">
+            <a:avLst>
+              <a:gd name="adj" fmla="val 16000"/>
+            </a:avLst>
+          </a:prstGeom>
+          <a:solidFill xmlns:a="http://schemas.openxmlformats.org/drawingml/2006/main">
+            <a:srgbClr val="C8161E"/>
+          </a:solidFill>
+          <a:ln xmlns:a="http://schemas.openxmlformats.org/drawingml/2006/main" w="0">
+            <a:noFill/>
+            <a:prstDash val="solid"/>
+          </a:ln>
+        </p:spPr>
+        <p:txBody>
+          <a:bodyPr xmlns:a="http://schemas.openxmlformats.org/drawingml/2006/main" lIns="76200" tIns="38100" rIns="76200" bIns="38100" anchor="ctr"/>
+          <a:lstStyle xmlns:a="http://schemas.openxmlformats.org/drawingml/2006/main"/>
+          <a:p xmlns:a="http://schemas.openxmlformats.org/drawingml/2006/main">
+            <a:pPr algn="ctr">
+              <a:lnSpc>
+                <a:spcPct val="112000"/>
+              </a:lnSpc>
+              <a:buNone/>
+              <a:defRPr sz="1500" b="1">
+                <a:solidFill>
+                  <a:srgbClr val="FFFFFF"/>
+                </a:solidFill>
+              </a:defRPr>
+            </a:pPr>
+            <a:r>
+              <a:rPr sz="1500" b="1">
+                <a:solidFill>
+                  <a:srgbClr val="FFFFFF"/>
+                </a:solidFill>
+                <a:latin typeface="Arial"/>
+                <a:ea typeface="Arial"/>
+                <a:cs typeface="Arial"/>
+              </a:rPr>
+              <a:t>3</a:t>
+            </a:r>
+          </a:p>
+        </p:txBody>
+      </p:sp>
+      <p:sp>
+        <p:nvSpPr>
+          <p:cNvPr id="13" name="summary-15-heading-2">
+            <a:extLst xmlns:a="http://schemas.openxmlformats.org/drawingml/2006/main">
+              <a:ext uri="{FF2B5EF4-FFF2-40B4-BE49-F238E27FC236}">
+                <a16:creationId xmlns:a16="http://schemas.microsoft.com/office/drawing/2014/main" id="{CCE1042E-FC58-4E12-934A-EE8E5360948A}"/>
+              </a:ext>
+            </a:extLst>
+          </p:cNvPr>
+          <p:cNvSpPr>
+            <a:spLocks xmlns:a="http://schemas.openxmlformats.org/drawingml/2006/main" noGrp="1"/>
+          </p:cNvSpPr>
+          <p:nvPr/>
+        </p:nvSpPr>
+        <p:spPr>
+          <a:xfrm xmlns:a="http://schemas.openxmlformats.org/drawingml/2006/main">
+            <a:off x="6858000" y="1162050"/>
+            <a:ext cx="2152650" cy="590550"/>
+          </a:xfrm>
+          <a:prstGeom xmlns:a="http://schemas.openxmlformats.org/drawingml/2006/main" prst="roundRect">
+            <a:avLst>
+              <a:gd name="adj" fmla="val 12903"/>
+            </a:avLst>
+          </a:prstGeom>
+          <a:solidFill xmlns:a="http://schemas.openxmlformats.org/drawingml/2006/main">
+            <a:srgbClr val="F8E9EA"/>
+          </a:solidFill>
+          <a:ln xmlns:a="http://schemas.openxmlformats.org/drawingml/2006/main" w="0">
+            <a:noFill/>
+            <a:prstDash val="solid"/>
+          </a:ln>
+        </p:spPr>
+        <p:txBody>
+          <a:bodyPr xmlns:a="http://schemas.openxmlformats.org/drawingml/2006/main" lIns="76200" tIns="38100" rIns="76200" bIns="38100" anchor="ctr"/>
+          <a:lstStyle xmlns:a="http://schemas.openxmlformats.org/drawingml/2006/main"/>
+          <a:p xmlns:a="http://schemas.openxmlformats.org/drawingml/2006/main">
+            <a:pPr algn="ctr">
+              <a:lnSpc>
+                <a:spcPct val="112000"/>
               </a:lnSpc>
               <a:buNone/>
               <a:defRPr sz="1725" b="1">
                 <a:solidFill>
-                  <a:srgbClr val="18354E"/>
+                  <a:srgbClr val="C8161E"/>
                 </a:solidFill>
               </a:defRPr>
             </a:pPr>
             <a:r>
               <a:rPr sz="1725" b="1">
                 <a:solidFill>
-                  <a:srgbClr val="18354E"/>
-                </a:solidFill>
-                <a:latin typeface="Microsoft YaHei"/>
-                <a:ea typeface="Microsoft YaHei"/>
-                <a:cs typeface="Microsoft YaHei"/>
-              </a:rPr>
-              <a:t>论文式短文定稿</a:t>
-            </a:r>
-          </a:p>
+                  <a:srgbClr val="C8161E"/>
+                </a:solidFill>
+                <a:latin typeface="Microsoft YaHei"/>
+                <a:ea typeface="Microsoft YaHei"/>
+                <a:cs typeface="Microsoft YaHei"/>
+              </a:rPr>
+              <a:t>致命项优先</a:t>
+            </a:r>
+          </a:p>
+        </p:txBody>
+      </p:sp>
+      <p:sp>
+        <p:nvSpPr>
+          <p:cNvPr id="14" name="summary-15-detail-2">
+            <a:extLst xmlns:a="http://schemas.openxmlformats.org/drawingml/2006/main">
+              <a:ext uri="{FF2B5EF4-FFF2-40B4-BE49-F238E27FC236}">
+                <a16:creationId xmlns:a16="http://schemas.microsoft.com/office/drawing/2014/main" id="{F69E8F77-25C2-44F0-B52D-E9DE0F8F1EEB}"/>
+              </a:ext>
+            </a:extLst>
+          </p:cNvPr>
+          <p:cNvSpPr>
+            <a:spLocks xmlns:a="http://schemas.openxmlformats.org/drawingml/2006/main" noGrp="1"/>
+          </p:cNvSpPr>
+          <p:nvPr/>
+        </p:nvSpPr>
+        <p:spPr>
+          <a:xfrm xmlns:a="http://schemas.openxmlformats.org/drawingml/2006/main">
+            <a:off x="6286500" y="2095500"/>
+            <a:ext cx="2724150" cy="1676400"/>
+          </a:xfrm>
+          <a:prstGeom xmlns:a="http://schemas.openxmlformats.org/drawingml/2006/main" prst="roundRect">
+            <a:avLst>
+              <a:gd name="adj" fmla="val 4545"/>
+            </a:avLst>
+          </a:prstGeom>
+          <a:solidFill xmlns:a="http://schemas.openxmlformats.org/drawingml/2006/main">
+            <a:srgbClr val="FFFFFF"/>
+          </a:solidFill>
+          <a:ln xmlns:a="http://schemas.openxmlformats.org/drawingml/2006/main" w="9525">
+            <a:solidFill>
+              <a:srgbClr val="D6DDE2"/>
+            </a:solidFill>
+            <a:prstDash val="solid"/>
+          </a:ln>
+        </p:spPr>
+        <p:txBody>
+          <a:bodyPr xmlns:a="http://schemas.openxmlformats.org/drawingml/2006/main" lIns="76200" tIns="38100" rIns="76200" bIns="38100" anchor="ctr"/>
+          <a:lstStyle xmlns:a="http://schemas.openxmlformats.org/drawingml/2006/main"/>
           <a:p xmlns:a="http://schemas.openxmlformats.org/drawingml/2006/main">
             <a:pPr algn="ctr">
               <a:lnSpc>
-                <a:spcPct val="125000"/>
+                <a:spcPct val="116000"/>
+              </a:lnSpc>
+              <a:buNone/>
+              <a:defRPr sz="1500" b="1">
+                <a:solidFill>
+                  <a:srgbClr val="263746"/>
+                </a:solidFill>
+              </a:defRPr>
+            </a:pPr>
+            <a:r>
+              <a:rPr sz="1500" b="1">
+                <a:solidFill>
+                  <a:srgbClr val="263746"/>
+                </a:solidFill>
+                <a:latin typeface="Microsoft YaHei"/>
+                <a:ea typeface="Microsoft YaHei"/>
+                <a:cs typeface="Microsoft YaHei"/>
+              </a:rPr>
+              <a:t>先修不可追溯、过度主张、失败缺失与权限越界</a:t>
+            </a:r>
+          </a:p>
+        </p:txBody>
+      </p:sp>
+      <p:sp>
+        <p:nvSpPr>
+          <p:cNvPr id="15" name="summary-15-number-3">
+            <a:extLst xmlns:a="http://schemas.openxmlformats.org/drawingml/2006/main">
+              <a:ext uri="{FF2B5EF4-FFF2-40B4-BE49-F238E27FC236}">
+                <a16:creationId xmlns:a16="http://schemas.microsoft.com/office/drawing/2014/main" id="{EC77828B-D1B3-445B-B8DF-9BD97578ED4A}"/>
+              </a:ext>
+            </a:extLst>
+          </p:cNvPr>
+          <p:cNvSpPr>
+            <a:spLocks xmlns:a="http://schemas.openxmlformats.org/drawingml/2006/main" noGrp="1"/>
+          </p:cNvSpPr>
+          <p:nvPr/>
+        </p:nvSpPr>
+        <p:spPr>
+          <a:xfrm xmlns:a="http://schemas.openxmlformats.org/drawingml/2006/main">
+            <a:off x="9201150" y="1219200"/>
+            <a:ext cx="476250" cy="476250"/>
+          </a:xfrm>
+          <a:prstGeom xmlns:a="http://schemas.openxmlformats.org/drawingml/2006/main" prst="roundRect">
+            <a:avLst>
+              <a:gd name="adj" fmla="val 16000"/>
+            </a:avLst>
+          </a:prstGeom>
+          <a:solidFill xmlns:a="http://schemas.openxmlformats.org/drawingml/2006/main">
+            <a:srgbClr val="A86C12"/>
+          </a:solidFill>
+          <a:ln xmlns:a="http://schemas.openxmlformats.org/drawingml/2006/main" w="0">
+            <a:noFill/>
+            <a:prstDash val="solid"/>
+          </a:ln>
+        </p:spPr>
+        <p:txBody>
+          <a:bodyPr xmlns:a="http://schemas.openxmlformats.org/drawingml/2006/main" lIns="76200" tIns="38100" rIns="76200" bIns="38100" anchor="ctr"/>
+          <a:lstStyle xmlns:a="http://schemas.openxmlformats.org/drawingml/2006/main"/>
+          <a:p xmlns:a="http://schemas.openxmlformats.org/drawingml/2006/main">
+            <a:pPr algn="ctr">
+              <a:lnSpc>
+                <a:spcPct val="112000"/>
+              </a:lnSpc>
+              <a:buNone/>
+              <a:defRPr sz="1500" b="1">
+                <a:solidFill>
+                  <a:srgbClr val="FFFFFF"/>
+                </a:solidFill>
+              </a:defRPr>
+            </a:pPr>
+            <a:r>
+              <a:rPr sz="1500" b="1">
+                <a:solidFill>
+                  <a:srgbClr val="FFFFFF"/>
+                </a:solidFill>
+                <a:latin typeface="Arial"/>
+                <a:ea typeface="Arial"/>
+                <a:cs typeface="Arial"/>
+              </a:rPr>
+              <a:t>4</a:t>
+            </a:r>
+          </a:p>
+        </p:txBody>
+      </p:sp>
+      <p:sp>
+        <p:nvSpPr>
+          <p:cNvPr id="16" name="summary-15-heading-3">
+            <a:extLst xmlns:a="http://schemas.openxmlformats.org/drawingml/2006/main">
+              <a:ext uri="{FF2B5EF4-FFF2-40B4-BE49-F238E27FC236}">
+                <a16:creationId xmlns:a16="http://schemas.microsoft.com/office/drawing/2014/main" id="{B3241F9F-946F-4A68-A835-BFA220B97324}"/>
+              </a:ext>
+            </a:extLst>
+          </p:cNvPr>
+          <p:cNvSpPr>
+            <a:spLocks xmlns:a="http://schemas.openxmlformats.org/drawingml/2006/main" noGrp="1"/>
+          </p:cNvSpPr>
+          <p:nvPr/>
+        </p:nvSpPr>
+        <p:spPr>
+          <a:xfrm xmlns:a="http://schemas.openxmlformats.org/drawingml/2006/main">
+            <a:off x="9772650" y="1162050"/>
+            <a:ext cx="2152650" cy="590550"/>
+          </a:xfrm>
+          <a:prstGeom xmlns:a="http://schemas.openxmlformats.org/drawingml/2006/main" prst="roundRect">
+            <a:avLst>
+              <a:gd name="adj" fmla="val 12903"/>
+            </a:avLst>
+          </a:prstGeom>
+          <a:solidFill xmlns:a="http://schemas.openxmlformats.org/drawingml/2006/main">
+            <a:srgbClr val="FAF0DD"/>
+          </a:solidFill>
+          <a:ln xmlns:a="http://schemas.openxmlformats.org/drawingml/2006/main" w="0">
+            <a:noFill/>
+            <a:prstDash val="solid"/>
+          </a:ln>
+        </p:spPr>
+        <p:txBody>
+          <a:bodyPr xmlns:a="http://schemas.openxmlformats.org/drawingml/2006/main" lIns="76200" tIns="38100" rIns="76200" bIns="38100" anchor="ctr"/>
+          <a:lstStyle xmlns:a="http://schemas.openxmlformats.org/drawingml/2006/main"/>
+          <a:p xmlns:a="http://schemas.openxmlformats.org/drawingml/2006/main">
+            <a:pPr algn="ctr">
+              <a:lnSpc>
+                <a:spcPct val="112000"/>
               </a:lnSpc>
               <a:buNone/>
               <a:defRPr sz="1725" b="1">
                 <a:solidFill>
-                  <a:srgbClr val="18354E"/>
+                  <a:srgbClr val="A86C12"/>
                 </a:solidFill>
               </a:defRPr>
             </a:pPr>
             <a:r>
               <a:rPr sz="1725" b="1">
                 <a:solidFill>
-                  <a:srgbClr val="18354E"/>
-                </a:solidFill>
-                <a:latin typeface="Microsoft YaHei"/>
-                <a:ea typeface="Microsoft YaHei"/>
-                <a:cs typeface="Microsoft YaHei"/>
-              </a:rPr>
-              <a:t>同行评审处理记录</a:t>
-            </a:r>
-          </a:p>
+                  <a:srgbClr val="A86C12"/>
+                </a:solidFill>
+                <a:latin typeface="Microsoft YaHei"/>
+                <a:ea typeface="Microsoft YaHei"/>
+                <a:cs typeface="Microsoft YaHei"/>
+              </a:rPr>
+              <a:t>论证门预检</a:t>
+            </a:r>
+          </a:p>
+        </p:txBody>
+      </p:sp>
+      <p:sp>
+        <p:nvSpPr>
+          <p:cNvPr id="17" name="summary-15-detail-3">
+            <a:extLst xmlns:a="http://schemas.openxmlformats.org/drawingml/2006/main">
+              <a:ext uri="{FF2B5EF4-FFF2-40B4-BE49-F238E27FC236}">
+                <a16:creationId xmlns:a16="http://schemas.microsoft.com/office/drawing/2014/main" id="{78A008C6-5D72-4B39-B273-A20CFB378C34}"/>
+              </a:ext>
+            </a:extLst>
+          </p:cNvPr>
+          <p:cNvSpPr>
+            <a:spLocks xmlns:a="http://schemas.openxmlformats.org/drawingml/2006/main" noGrp="1"/>
+          </p:cNvSpPr>
+          <p:nvPr/>
+        </p:nvSpPr>
+        <p:spPr>
+          <a:xfrm xmlns:a="http://schemas.openxmlformats.org/drawingml/2006/main">
+            <a:off x="9201150" y="2095500"/>
+            <a:ext cx="2724150" cy="1676400"/>
+          </a:xfrm>
+          <a:prstGeom xmlns:a="http://schemas.openxmlformats.org/drawingml/2006/main" prst="roundRect">
+            <a:avLst>
+              <a:gd name="adj" fmla="val 4545"/>
+            </a:avLst>
+          </a:prstGeom>
+          <a:solidFill xmlns:a="http://schemas.openxmlformats.org/drawingml/2006/main">
+            <a:srgbClr val="FFFFFF"/>
+          </a:solidFill>
+          <a:ln xmlns:a="http://schemas.openxmlformats.org/drawingml/2006/main" w="9525">
+            <a:solidFill>
+              <a:srgbClr val="D6DDE2"/>
+            </a:solidFill>
+            <a:prstDash val="solid"/>
+          </a:ln>
+        </p:spPr>
+        <p:txBody>
+          <a:bodyPr xmlns:a="http://schemas.openxmlformats.org/drawingml/2006/main" lIns="76200" tIns="38100" rIns="76200" bIns="38100" anchor="ctr"/>
+          <a:lstStyle xmlns:a="http://schemas.openxmlformats.org/drawingml/2006/main"/>
           <a:p xmlns:a="http://schemas.openxmlformats.org/drawingml/2006/main">
             <a:pPr algn="ctr">
               <a:lnSpc>
-                <a:spcPct val="125000"/>
+                <a:spcPct val="116000"/>
+              </a:lnSpc>
+              <a:buNone/>
+              <a:defRPr sz="1500" b="1">
+                <a:solidFill>
+                  <a:srgbClr val="263746"/>
+                </a:solidFill>
+              </a:defRPr>
+            </a:pPr>
+            <a:r>
+              <a:rPr sz="1500" b="1">
+                <a:solidFill>
+                  <a:srgbClr val="263746"/>
+                </a:solidFill>
+                <a:latin typeface="Microsoft YaHei"/>
+                <a:ea typeface="Microsoft YaHei"/>
+                <a:cs typeface="Microsoft YaHei"/>
+              </a:rPr>
+              <a:t>按十项条件确认最终提交范围、缺口与回退路径</a:t>
+            </a:r>
+          </a:p>
+        </p:txBody>
+      </p:sp>
+      <p:sp>
+        <p:nvSpPr>
+          <p:cNvPr id="18" name="summary-15-boundary">
+            <a:extLst xmlns:a="http://schemas.openxmlformats.org/drawingml/2006/main">
+              <a:ext uri="{FF2B5EF4-FFF2-40B4-BE49-F238E27FC236}">
+                <a16:creationId xmlns:a16="http://schemas.microsoft.com/office/drawing/2014/main" id="{A7847458-82A3-42BE-AE10-2842F8404113}"/>
+              </a:ext>
+            </a:extLst>
+          </p:cNvPr>
+          <p:cNvSpPr>
+            <a:spLocks xmlns:a="http://schemas.openxmlformats.org/drawingml/2006/main" noGrp="1"/>
+          </p:cNvSpPr>
+          <p:nvPr/>
+        </p:nvSpPr>
+        <p:spPr>
+          <a:xfrm xmlns:a="http://schemas.openxmlformats.org/drawingml/2006/main">
+            <a:off x="1162050" y="4400550"/>
+            <a:ext cx="9867900" cy="876300"/>
+          </a:xfrm>
+          <a:prstGeom xmlns:a="http://schemas.openxmlformats.org/drawingml/2006/main" prst="roundRect">
+            <a:avLst>
+              <a:gd name="adj" fmla="val 8696"/>
+            </a:avLst>
+          </a:prstGeom>
+          <a:solidFill xmlns:a="http://schemas.openxmlformats.org/drawingml/2006/main">
+            <a:srgbClr val="F8E9EA"/>
+          </a:solidFill>
+          <a:ln xmlns:a="http://schemas.openxmlformats.org/drawingml/2006/main" w="0">
+            <a:noFill/>
+            <a:prstDash val="solid"/>
+          </a:ln>
+        </p:spPr>
+        <p:txBody>
+          <a:bodyPr xmlns:a="http://schemas.openxmlformats.org/drawingml/2006/main" lIns="76200" tIns="38100" rIns="76200" bIns="38100" anchor="ctr"/>
+          <a:lstStyle xmlns:a="http://schemas.openxmlformats.org/drawingml/2006/main"/>
+          <a:p xmlns:a="http://schemas.openxmlformats.org/drawingml/2006/main">
+            <a:pPr algn="ctr">
+              <a:lnSpc>
+                <a:spcPct val="114000"/>
               </a:lnSpc>
               <a:buNone/>
               <a:defRPr sz="1725" b="1">
                 <a:solidFill>
-                  <a:srgbClr val="18354E"/>
+                  <a:srgbClr val="C8161E"/>
                 </a:solidFill>
               </a:defRPr>
             </a:pPr>
             <a:r>
               <a:rPr sz="1725" b="1">
                 <a:solidFill>
-                  <a:srgbClr val="18354E"/>
-                </a:solidFill>
-                <a:latin typeface="Microsoft YaHei"/>
-                <a:ea typeface="Microsoft YaHei"/>
-                <a:cs typeface="Microsoft YaHei"/>
-              </a:rPr>
-              <a:t>复现与 Workflow 材料</a:t>
-            </a:r>
-          </a:p>
-          <a:p xmlns:a="http://schemas.openxmlformats.org/drawingml/2006/main">
-            <a:pPr algn="ctr">
-              <a:lnSpc>
-                <a:spcPct val="125000"/>
-              </a:lnSpc>
-              <a:buNone/>
-              <a:defRPr sz="1725" b="1">
-                <a:solidFill>
-                  <a:srgbClr val="18354E"/>
-                </a:solidFill>
-              </a:defRPr>
-            </a:pPr>
-            <a:r>
-              <a:rPr sz="1725" b="1">
-                <a:solidFill>
-                  <a:srgbClr val="18354E"/>
-                </a:solidFill>
-                <a:latin typeface="Microsoft YaHei"/>
-                <a:ea typeface="Microsoft YaHei"/>
-                <a:cs typeface="Microsoft YaHei"/>
-              </a:rPr>
-              <a:t>伦理 / AI 披露</a:t>
-            </a:r>
-          </a:p>
-          <a:p xmlns:a="http://schemas.openxmlformats.org/drawingml/2006/main">
-            <a:pPr algn="ctr">
-              <a:lnSpc>
-                <a:spcPct val="125000"/>
-              </a:lnSpc>
-              <a:buNone/>
-              <a:defRPr sz="1725" b="1">
-                <a:solidFill>
-                  <a:srgbClr val="18354E"/>
-                </a:solidFill>
-              </a:defRPr>
-            </a:pPr>
-            <a:r>
-              <a:rPr sz="1725" b="1">
-                <a:solidFill>
-                  <a:srgbClr val="18354E"/>
-                </a:solidFill>
-                <a:latin typeface="Microsoft YaHei"/>
-                <a:ea typeface="Microsoft YaHei"/>
-                <a:cs typeface="Microsoft YaHei"/>
-              </a:rPr>
-              <a:t>个人展示与抽查</a:t>
-            </a:r>
-          </a:p>
-        </p:txBody>
-      </p:sp>
-      <p:sp>
-        <p:nvSpPr>
-          <p:cNvPr id="14" name="p13c">
-            <a:extLst xmlns:a="http://schemas.openxmlformats.org/drawingml/2006/main">
-              <a:ext uri="{FF2B5EF4-FFF2-40B4-BE49-F238E27FC236}">
-                <a16:creationId xmlns:a16="http://schemas.microsoft.com/office/drawing/2014/main" id="{803C4B33-759F-4E71-B570-BBAAE43C6CC8}"/>
-              </a:ext>
-            </a:extLst>
-          </p:cNvPr>
-          <p:cNvSpPr>
-            <a:spLocks xmlns:a="http://schemas.openxmlformats.org/drawingml/2006/main" noGrp="1"/>
-          </p:cNvSpPr>
-          <p:nvPr/>
-        </p:nvSpPr>
-        <p:spPr>
-          <a:xfrm xmlns:a="http://schemas.openxmlformats.org/drawingml/2006/main">
-            <a:off x="1428750" y="4953000"/>
-            <a:ext cx="9334500" cy="533400"/>
-          </a:xfrm>
-          <a:prstGeom xmlns:a="http://schemas.openxmlformats.org/drawingml/2006/main" prst="rect">
-            <a:avLst/>
-          </a:prstGeom>
-          <a:solidFill xmlns:a="http://schemas.openxmlformats.org/drawingml/2006/main">
-            <a:srgbClr val="F8E9EA"/>
-          </a:solidFill>
-          <a:ln xmlns:a="http://schemas.openxmlformats.org/drawingml/2006/main" w="0">
-            <a:noFill/>
-            <a:prstDash val="solid"/>
-          </a:ln>
-        </p:spPr>
-        <p:txBody>
-          <a:bodyPr xmlns:a="http://schemas.openxmlformats.org/drawingml/2006/main" lIns="76200" tIns="38100" rIns="76200" bIns="38100" anchor="ctr"/>
-          <a:lstStyle xmlns:a="http://schemas.openxmlformats.org/drawingml/2006/main"/>
-          <a:p xmlns:a="http://schemas.openxmlformats.org/drawingml/2006/main">
-            <a:pPr algn="ctr">
-              <a:lnSpc>
-                <a:spcPct val="110000"/>
-              </a:lnSpc>
-              <a:buNone/>
-              <a:defRPr sz="1650" b="1">
-                <a:solidFill>
                   <a:srgbClr val="C8161E"/>
                 </a:solidFill>
-              </a:defRPr>
-            </a:pPr>
-            <a:r>
-              <a:rPr sz="1650" b="1">
-                <a:solidFill>
-                  <a:srgbClr val="C8161E"/>
-                </a:solidFill>
-                <a:latin typeface="Microsoft YaHei"/>
-                <a:ea typeface="Microsoft YaHei"/>
-                <a:cs typeface="Microsoft YaHei"/>
-              </a:rPr>
-              <a:t>本课不正式提交；保存当前个人项目版本与缺口清单。</a:t>
+                <a:latin typeface="Microsoft YaHei"/>
+                <a:ea typeface="Microsoft YaHei"/>
+                <a:cs typeface="Microsoft YaHei"/>
+              </a:rPr>
+              <a:t>关键边界：同伴只提供可执行问题与证据，作者保留研究判断和最终提交责任。</a:t>
             </a:r>
           </a:p>
         </p:txBody>
@@ -7363,7 +7515,7 @@
                 <a:ea typeface="Microsoft YaHei"/>
                 <a:cs typeface="Microsoft YaHei"/>
               </a:rPr>
-              <a:t>备用：实践轮次与工件写回索引</a:t>
+              <a:t>先修致命项，再带缺口进入第 16 课</a:t>
             </a:r>
             <a:endParaRPr/>
           </a:p>
@@ -7399,49 +7551,112 @@
       </p:sp>
       <p:sp>
         <p:nvSpPr>
-          <p:cNvPr id="6" name="lab">
-            <a:extLst xmlns:a="http://schemas.openxmlformats.org/drawingml/2006/main">
-              <a:ext uri="{FF2B5EF4-FFF2-40B4-BE49-F238E27FC236}">
-                <a16:creationId xmlns:a16="http://schemas.microsoft.com/office/drawing/2014/main" id="{A82CDC4D-8BD0-4EE1-BA66-C5C6042E89A7}"/>
-              </a:ext>
-            </a:extLst>
-          </p:cNvPr>
-          <p:cNvSpPr>
-            <a:spLocks xmlns:a="http://schemas.openxmlformats.org/drawingml/2006/main" noGrp="1"/>
-          </p:cNvSpPr>
-          <p:nvPr/>
-        </p:nvSpPr>
-        <p:spPr>
-          <a:xfrm xmlns:a="http://schemas.openxmlformats.org/drawingml/2006/main">
-            <a:off x="9144000" y="838200"/>
-            <a:ext cx="2419350" cy="304800"/>
+          <p:cNvPr id="6" name="p13a0">
+            <a:extLst xmlns:a="http://schemas.openxmlformats.org/drawingml/2006/main">
+              <a:ext uri="{FF2B5EF4-FFF2-40B4-BE49-F238E27FC236}">
+                <a16:creationId xmlns:a16="http://schemas.microsoft.com/office/drawing/2014/main" id="{0ACCED3C-B0D9-46E0-8B5E-AD0991299586}"/>
+              </a:ext>
+            </a:extLst>
+          </p:cNvPr>
+          <p:cNvSpPr>
+            <a:spLocks xmlns:a="http://schemas.openxmlformats.org/drawingml/2006/main" noGrp="1"/>
+          </p:cNvSpPr>
+          <p:nvPr/>
+        </p:nvSpPr>
+        <p:spPr>
+          <a:xfrm xmlns:a="http://schemas.openxmlformats.org/drawingml/2006/main">
+            <a:off x="590550" y="1200150"/>
+            <a:ext cx="1352550" cy="609600"/>
+          </a:xfrm>
+          <a:prstGeom xmlns:a="http://schemas.openxmlformats.org/drawingml/2006/main" prst="roundRect">
+            <a:avLst>
+              <a:gd name="adj" fmla="val 12500"/>
+            </a:avLst>
+          </a:prstGeom>
+          <a:solidFill xmlns:a="http://schemas.openxmlformats.org/drawingml/2006/main">
+            <a:srgbClr val="C8161E"/>
+          </a:solidFill>
+          <a:ln xmlns:a="http://schemas.openxmlformats.org/drawingml/2006/main" w="0">
+            <a:noFill/>
+            <a:prstDash val="solid"/>
+          </a:ln>
+        </p:spPr>
+        <p:txBody>
+          <a:bodyPr xmlns:a="http://schemas.openxmlformats.org/drawingml/2006/main" lIns="76200" tIns="38100" rIns="76200" bIns="38100" anchor="ctr"/>
+          <a:lstStyle xmlns:a="http://schemas.openxmlformats.org/drawingml/2006/main"/>
+          <a:p xmlns:a="http://schemas.openxmlformats.org/drawingml/2006/main">
+            <a:pPr algn="ctr">
+              <a:lnSpc>
+                <a:spcPct val="110000"/>
+              </a:lnSpc>
+              <a:buNone/>
+              <a:defRPr sz="1500" b="1">
+                <a:solidFill>
+                  <a:srgbClr val="FFFFFF"/>
+                </a:solidFill>
+              </a:defRPr>
+            </a:pPr>
+            <a:r>
+              <a:rPr sz="1500" b="1">
+                <a:solidFill>
+                  <a:srgbClr val="FFFFFF"/>
+                </a:solidFill>
+                <a:latin typeface="Microsoft YaHei"/>
+                <a:ea typeface="Microsoft YaHei"/>
+                <a:cs typeface="Microsoft YaHei"/>
+              </a:rPr>
+              <a:t>致命</a:t>
+            </a:r>
+          </a:p>
+        </p:txBody>
+      </p:sp>
+      <p:sp>
+        <p:nvSpPr>
+          <p:cNvPr id="7" name="p13b0">
+            <a:extLst xmlns:a="http://schemas.openxmlformats.org/drawingml/2006/main">
+              <a:ext uri="{FF2B5EF4-FFF2-40B4-BE49-F238E27FC236}">
+                <a16:creationId xmlns:a16="http://schemas.microsoft.com/office/drawing/2014/main" id="{911927D7-3D5D-4C8C-9890-6545BC83CC70}"/>
+              </a:ext>
+            </a:extLst>
+          </p:cNvPr>
+          <p:cNvSpPr>
+            <a:spLocks xmlns:a="http://schemas.openxmlformats.org/drawingml/2006/main" noGrp="1"/>
+          </p:cNvSpPr>
+          <p:nvPr/>
+        </p:nvSpPr>
+        <p:spPr>
+          <a:xfrm xmlns:a="http://schemas.openxmlformats.org/drawingml/2006/main">
+            <a:off x="2114550" y="1200150"/>
+            <a:ext cx="4095750" cy="609600"/>
           </a:xfrm>
           <a:prstGeom xmlns:a="http://schemas.openxmlformats.org/drawingml/2006/main" prst="rect">
             <a:avLst/>
           </a:prstGeom>
-          <a:noFill xmlns:a="http://schemas.openxmlformats.org/drawingml/2006/main"/>
-          <a:ln xmlns:a="http://schemas.openxmlformats.org/drawingml/2006/main" w="0">
-            <a:noFill/>
-            <a:prstDash val="solid"/>
-          </a:ln>
-        </p:spPr>
-        <p:txBody>
-          <a:bodyPr xmlns:a="http://schemas.openxmlformats.org/drawingml/2006/main" lIns="76200" tIns="38100" rIns="76200" bIns="38100" anchor="ctr"/>
-          <a:lstStyle xmlns:a="http://schemas.openxmlformats.org/drawingml/2006/main"/>
-          <a:p xmlns:a="http://schemas.openxmlformats.org/drawingml/2006/main">
-            <a:pPr algn="r">
-              <a:lnSpc>
-                <a:spcPct val="110000"/>
-              </a:lnSpc>
-              <a:buNone/>
-              <a:defRPr sz="1125" b="1">
+          <a:solidFill xmlns:a="http://schemas.openxmlformats.org/drawingml/2006/main">
+            <a:srgbClr val="F8E9EA"/>
+          </a:solidFill>
+          <a:ln xmlns:a="http://schemas.openxmlformats.org/drawingml/2006/main" w="0">
+            <a:noFill/>
+            <a:prstDash val="solid"/>
+          </a:ln>
+        </p:spPr>
+        <p:txBody>
+          <a:bodyPr xmlns:a="http://schemas.openxmlformats.org/drawingml/2006/main" lIns="76200" tIns="38100" rIns="76200" bIns="38100" anchor="ctr"/>
+          <a:lstStyle xmlns:a="http://schemas.openxmlformats.org/drawingml/2006/main"/>
+          <a:p xmlns:a="http://schemas.openxmlformats.org/drawingml/2006/main">
+            <a:pPr algn="l">
+              <a:lnSpc>
+                <a:spcPct val="110000"/>
+              </a:lnSpc>
+              <a:buNone/>
+              <a:defRPr sz="1500" b="1">
                 <a:solidFill>
                   <a:srgbClr val="C8161E"/>
                 </a:solidFill>
               </a:defRPr>
             </a:pPr>
             <a:r>
-              <a:rPr sz="1125" b="1">
+              <a:rPr sz="1500" b="1">
                 <a:solidFill>
                   <a:srgbClr val="C8161E"/>
                 </a:solidFill>
@@ -7449,37 +7664,37 @@
                 <a:ea typeface="Microsoft YaHei"/>
                 <a:cs typeface="Microsoft YaHei"/>
               </a:rPr>
-              <a:t>备用页｜不计入主节奏</a:t>
-            </a:r>
-          </a:p>
-        </p:txBody>
-      </p:sp>
-      <p:sp>
-        <p:nvSpPr>
-          <p:cNvPr id="7" name="p140a">
-            <a:extLst xmlns:a="http://schemas.openxmlformats.org/drawingml/2006/main">
-              <a:ext uri="{FF2B5EF4-FFF2-40B4-BE49-F238E27FC236}">
-                <a16:creationId xmlns:a16="http://schemas.microsoft.com/office/drawing/2014/main" id="{A76B09FB-426D-4FFE-9C57-5739A40507A1}"/>
-              </a:ext>
-            </a:extLst>
-          </p:cNvPr>
-          <p:cNvSpPr>
-            <a:spLocks xmlns:a="http://schemas.openxmlformats.org/drawingml/2006/main" noGrp="1"/>
-          </p:cNvSpPr>
-          <p:nvPr/>
-        </p:nvSpPr>
-        <p:spPr>
-          <a:xfrm xmlns:a="http://schemas.openxmlformats.org/drawingml/2006/main">
-            <a:off x="723900" y="1181100"/>
-            <a:ext cx="1428750" cy="590550"/>
+              <a:t>论证门不满足；第16课前修复</a:t>
+            </a:r>
+          </a:p>
+        </p:txBody>
+      </p:sp>
+      <p:sp>
+        <p:nvSpPr>
+          <p:cNvPr id="8" name="p13a1">
+            <a:extLst xmlns:a="http://schemas.openxmlformats.org/drawingml/2006/main">
+              <a:ext uri="{FF2B5EF4-FFF2-40B4-BE49-F238E27FC236}">
+                <a16:creationId xmlns:a16="http://schemas.microsoft.com/office/drawing/2014/main" id="{9A2F9FF1-AB89-443F-80EC-E86255729706}"/>
+              </a:ext>
+            </a:extLst>
+          </p:cNvPr>
+          <p:cNvSpPr>
+            <a:spLocks xmlns:a="http://schemas.openxmlformats.org/drawingml/2006/main" noGrp="1"/>
+          </p:cNvSpPr>
+          <p:nvPr/>
+        </p:nvSpPr>
+        <p:spPr>
+          <a:xfrm xmlns:a="http://schemas.openxmlformats.org/drawingml/2006/main">
+            <a:off x="590550" y="2305050"/>
+            <a:ext cx="1352550" cy="609600"/>
           </a:xfrm>
           <a:prstGeom xmlns:a="http://schemas.openxmlformats.org/drawingml/2006/main" prst="roundRect">
             <a:avLst>
-              <a:gd name="adj" fmla="val 12903"/>
+              <a:gd name="adj" fmla="val 12500"/>
             </a:avLst>
           </a:prstGeom>
           <a:solidFill xmlns:a="http://schemas.openxmlformats.org/drawingml/2006/main">
-            <a:srgbClr val="18354E"/>
+            <a:srgbClr val="A86C12"/>
           </a:solidFill>
           <a:ln xmlns:a="http://schemas.openxmlformats.org/drawingml/2006/main" w="0">
             <a:noFill/>
@@ -7495,14 +7710,14 @@
                 <a:spcPct val="110000"/>
               </a:lnSpc>
               <a:buNone/>
-              <a:defRPr sz="1350" b="1">
+              <a:defRPr sz="1500" b="1">
                 <a:solidFill>
                   <a:srgbClr val="FFFFFF"/>
                 </a:solidFill>
               </a:defRPr>
             </a:pPr>
             <a:r>
-              <a:rPr sz="1350" b="1">
+              <a:rPr sz="1500" b="1">
                 <a:solidFill>
                   <a:srgbClr val="FFFFFF"/>
                 </a:solidFill>
@@ -7510,35 +7725,35 @@
                 <a:ea typeface="Microsoft YaHei"/>
                 <a:cs typeface="Microsoft YaHei"/>
               </a:rPr>
-              <a:t>35-50</a:t>
-            </a:r>
-          </a:p>
-        </p:txBody>
-      </p:sp>
-      <p:sp>
-        <p:nvSpPr>
-          <p:cNvPr id="8" name="p140b">
-            <a:extLst xmlns:a="http://schemas.openxmlformats.org/drawingml/2006/main">
-              <a:ext uri="{FF2B5EF4-FFF2-40B4-BE49-F238E27FC236}">
-                <a16:creationId xmlns:a16="http://schemas.microsoft.com/office/drawing/2014/main" id="{D4C99E43-5D93-4EB7-AA41-7DF3D8FBABA5}"/>
-              </a:ext>
-            </a:extLst>
-          </p:cNvPr>
-          <p:cNvSpPr>
-            <a:spLocks xmlns:a="http://schemas.openxmlformats.org/drawingml/2006/main" noGrp="1"/>
-          </p:cNvSpPr>
-          <p:nvPr/>
-        </p:nvSpPr>
-        <p:spPr>
-          <a:xfrm xmlns:a="http://schemas.openxmlformats.org/drawingml/2006/main">
-            <a:off x="2286000" y="1181100"/>
-            <a:ext cx="8572500" cy="590550"/>
+              <a:t>重要</a:t>
+            </a:r>
+          </a:p>
+        </p:txBody>
+      </p:sp>
+      <p:sp>
+        <p:nvSpPr>
+          <p:cNvPr id="9" name="p13b1">
+            <a:extLst xmlns:a="http://schemas.openxmlformats.org/drawingml/2006/main">
+              <a:ext uri="{FF2B5EF4-FFF2-40B4-BE49-F238E27FC236}">
+                <a16:creationId xmlns:a16="http://schemas.microsoft.com/office/drawing/2014/main" id="{55A71454-96A0-429A-A3DD-C8CC34E4D81D}"/>
+              </a:ext>
+            </a:extLst>
+          </p:cNvPr>
+          <p:cNvSpPr>
+            <a:spLocks xmlns:a="http://schemas.openxmlformats.org/drawingml/2006/main" noGrp="1"/>
+          </p:cNvSpPr>
+          <p:nvPr/>
+        </p:nvSpPr>
+        <p:spPr>
+          <a:xfrm xmlns:a="http://schemas.openxmlformats.org/drawingml/2006/main">
+            <a:off x="2114550" y="2305050"/>
+            <a:ext cx="4095750" cy="609600"/>
           </a:xfrm>
           <a:prstGeom xmlns:a="http://schemas.openxmlformats.org/drawingml/2006/main" prst="rect">
             <a:avLst/>
           </a:prstGeom>
           <a:solidFill xmlns:a="http://schemas.openxmlformats.org/drawingml/2006/main">
-            <a:srgbClr val="F3F6F7"/>
+            <a:srgbClr val="FAF0DD"/>
           </a:solidFill>
           <a:ln xmlns:a="http://schemas.openxmlformats.org/drawingml/2006/main" w="0">
             <a:noFill/>
@@ -7556,50 +7771,50 @@
               <a:buNone/>
               <a:defRPr sz="1500" b="1">
                 <a:solidFill>
-                  <a:srgbClr val="263746"/>
+                  <a:srgbClr val="A86C12"/>
                 </a:solidFill>
               </a:defRPr>
             </a:pPr>
             <a:r>
               <a:rPr sz="1500" b="1">
                 <a:solidFill>
-                  <a:srgbClr val="263746"/>
-                </a:solidFill>
-                <a:latin typeface="Microsoft YaHei"/>
-                <a:ea typeface="Microsoft YaHei"/>
-                <a:cs typeface="Microsoft YaHei"/>
-              </a:rPr>
-              <a:t>评 1 位同伴 + 三问  →  peer-review.md</a:t>
-            </a:r>
-          </a:p>
-        </p:txBody>
-      </p:sp>
-      <p:sp>
-        <p:nvSpPr>
-          <p:cNvPr id="9" name="p141a">
-            <a:extLst xmlns:a="http://schemas.openxmlformats.org/drawingml/2006/main">
-              <a:ext uri="{FF2B5EF4-FFF2-40B4-BE49-F238E27FC236}">
-                <a16:creationId xmlns:a16="http://schemas.microsoft.com/office/drawing/2014/main" id="{DDDA4BEB-8874-4DA4-BA7E-473152CCB5F5}"/>
-              </a:ext>
-            </a:extLst>
-          </p:cNvPr>
-          <p:cNvSpPr>
-            <a:spLocks xmlns:a="http://schemas.openxmlformats.org/drawingml/2006/main" noGrp="1"/>
-          </p:cNvSpPr>
-          <p:nvPr/>
-        </p:nvSpPr>
-        <p:spPr>
-          <a:xfrm xmlns:a="http://schemas.openxmlformats.org/drawingml/2006/main">
-            <a:off x="723900" y="2114550"/>
-            <a:ext cx="1428750" cy="590550"/>
+                  <a:srgbClr val="A86C12"/>
+                </a:solidFill>
+                <a:latin typeface="Microsoft YaHei"/>
+                <a:ea typeface="Microsoft YaHei"/>
+                <a:cs typeface="Microsoft YaHei"/>
+              </a:rPr>
+              <a:t>有缺口；尽量修复或标待验证</a:t>
+            </a:r>
+          </a:p>
+        </p:txBody>
+      </p:sp>
+      <p:sp>
+        <p:nvSpPr>
+          <p:cNvPr id="10" name="p13a2">
+            <a:extLst xmlns:a="http://schemas.openxmlformats.org/drawingml/2006/main">
+              <a:ext uri="{FF2B5EF4-FFF2-40B4-BE49-F238E27FC236}">
+                <a16:creationId xmlns:a16="http://schemas.microsoft.com/office/drawing/2014/main" id="{E5F33EFA-0265-4FE6-83A4-E491F86F540A}"/>
+              </a:ext>
+            </a:extLst>
+          </p:cNvPr>
+          <p:cNvSpPr>
+            <a:spLocks xmlns:a="http://schemas.openxmlformats.org/drawingml/2006/main" noGrp="1"/>
+          </p:cNvSpPr>
+          <p:nvPr/>
+        </p:nvSpPr>
+        <p:spPr>
+          <a:xfrm xmlns:a="http://schemas.openxmlformats.org/drawingml/2006/main">
+            <a:off x="590550" y="3409950"/>
+            <a:ext cx="1352550" cy="609600"/>
           </a:xfrm>
           <a:prstGeom xmlns:a="http://schemas.openxmlformats.org/drawingml/2006/main" prst="roundRect">
             <a:avLst>
-              <a:gd name="adj" fmla="val 12903"/>
+              <a:gd name="adj" fmla="val 12500"/>
             </a:avLst>
           </a:prstGeom>
           <a:solidFill xmlns:a="http://schemas.openxmlformats.org/drawingml/2006/main">
-            <a:srgbClr val="18354E"/>
+            <a:srgbClr val="28745A"/>
           </a:solidFill>
           <a:ln xmlns:a="http://schemas.openxmlformats.org/drawingml/2006/main" w="0">
             <a:noFill/>
@@ -7615,14 +7830,14 @@
                 <a:spcPct val="110000"/>
               </a:lnSpc>
               <a:buNone/>
-              <a:defRPr sz="1350" b="1">
+              <a:defRPr sz="1500" b="1">
                 <a:solidFill>
                   <a:srgbClr val="FFFFFF"/>
                 </a:solidFill>
               </a:defRPr>
             </a:pPr>
             <a:r>
-              <a:rPr sz="1350" b="1">
+              <a:rPr sz="1500" b="1">
                 <a:solidFill>
                   <a:srgbClr val="FFFFFF"/>
                 </a:solidFill>
@@ -7630,35 +7845,35 @@
                 <a:ea typeface="Microsoft YaHei"/>
                 <a:cs typeface="Microsoft YaHei"/>
               </a:rPr>
-              <a:t>50-65</a:t>
-            </a:r>
-          </a:p>
-        </p:txBody>
-      </p:sp>
-      <p:sp>
-        <p:nvSpPr>
-          <p:cNvPr id="10" name="p141b">
-            <a:extLst xmlns:a="http://schemas.openxmlformats.org/drawingml/2006/main">
-              <a:ext uri="{FF2B5EF4-FFF2-40B4-BE49-F238E27FC236}">
-                <a16:creationId xmlns:a16="http://schemas.microsoft.com/office/drawing/2014/main" id="{FF86E8E0-5713-4F7B-9553-C4F41ECB65E4}"/>
-              </a:ext>
-            </a:extLst>
-          </p:cNvPr>
-          <p:cNvSpPr>
-            <a:spLocks xmlns:a="http://schemas.openxmlformats.org/drawingml/2006/main" noGrp="1"/>
-          </p:cNvSpPr>
-          <p:nvPr/>
-        </p:nvSpPr>
-        <p:spPr>
-          <a:xfrm xmlns:a="http://schemas.openxmlformats.org/drawingml/2006/main">
-            <a:off x="2286000" y="2114550"/>
-            <a:ext cx="8572500" cy="590550"/>
+              <a:t>表达</a:t>
+            </a:r>
+          </a:p>
+        </p:txBody>
+      </p:sp>
+      <p:sp>
+        <p:nvSpPr>
+          <p:cNvPr id="11" name="p13b2">
+            <a:extLst xmlns:a="http://schemas.openxmlformats.org/drawingml/2006/main">
+              <a:ext uri="{FF2B5EF4-FFF2-40B4-BE49-F238E27FC236}">
+                <a16:creationId xmlns:a16="http://schemas.microsoft.com/office/drawing/2014/main" id="{FB54A1CB-0794-46DA-A195-975F965B17F8}"/>
+              </a:ext>
+            </a:extLst>
+          </p:cNvPr>
+          <p:cNvSpPr>
+            <a:spLocks xmlns:a="http://schemas.openxmlformats.org/drawingml/2006/main" noGrp="1"/>
+          </p:cNvSpPr>
+          <p:nvPr/>
+        </p:nvSpPr>
+        <p:spPr>
+          <a:xfrm xmlns:a="http://schemas.openxmlformats.org/drawingml/2006/main">
+            <a:off x="2114550" y="3409950"/>
+            <a:ext cx="4095750" cy="609600"/>
           </a:xfrm>
           <a:prstGeom xmlns:a="http://schemas.openxmlformats.org/drawingml/2006/main" prst="rect">
             <a:avLst/>
           </a:prstGeom>
           <a:solidFill xmlns:a="http://schemas.openxmlformats.org/drawingml/2006/main">
-            <a:srgbClr val="F3F6F7"/>
+            <a:srgbClr val="E7F2ED"/>
           </a:solidFill>
           <a:ln xmlns:a="http://schemas.openxmlformats.org/drawingml/2006/main" w="0">
             <a:noFill/>
@@ -7676,50 +7891,81 @@
               <a:buNone/>
               <a:defRPr sz="1500" b="1">
                 <a:solidFill>
-                  <a:srgbClr val="263746"/>
+                  <a:srgbClr val="28745A"/>
                 </a:solidFill>
               </a:defRPr>
             </a:pPr>
             <a:r>
               <a:rPr sz="1500" b="1">
                 <a:solidFill>
-                  <a:srgbClr val="263746"/>
-                </a:solidFill>
-                <a:latin typeface="Microsoft YaHei"/>
-                <a:ea typeface="Microsoft YaHei"/>
-                <a:cs typeface="Microsoft YaHei"/>
-              </a:rPr>
-              <a:t>写 ≥2 条作者回应  →  peer-review.md</a:t>
-            </a:r>
-          </a:p>
-        </p:txBody>
-      </p:sp>
-      <p:sp>
-        <p:nvSpPr>
-          <p:cNvPr id="11" name="p142a">
-            <a:extLst xmlns:a="http://schemas.openxmlformats.org/drawingml/2006/main">
-              <a:ext uri="{FF2B5EF4-FFF2-40B4-BE49-F238E27FC236}">
-                <a16:creationId xmlns:a16="http://schemas.microsoft.com/office/drawing/2014/main" id="{C939D0F2-7961-4E48-99B6-219755D26909}"/>
-              </a:ext>
-            </a:extLst>
-          </p:cNvPr>
-          <p:cNvSpPr>
-            <a:spLocks xmlns:a="http://schemas.openxmlformats.org/drawingml/2006/main" noGrp="1"/>
-          </p:cNvSpPr>
-          <p:nvPr/>
-        </p:nvSpPr>
-        <p:spPr>
-          <a:xfrm xmlns:a="http://schemas.openxmlformats.org/drawingml/2006/main">
-            <a:off x="723900" y="3048000"/>
-            <a:ext cx="1428750" cy="590550"/>
+                  <a:srgbClr val="28745A"/>
+                </a:solidFill>
+                <a:latin typeface="Microsoft YaHei"/>
+                <a:ea typeface="Microsoft YaHei"/>
+                <a:cs typeface="Microsoft YaHei"/>
+              </a:rPr>
+              <a:t>论证成立；展示前打磨</a:t>
+            </a:r>
+          </a:p>
+        </p:txBody>
+      </p:sp>
+      <p:sp>
+        <p:nvSpPr>
+          <p:cNvPr id="12" name="p13mid">
+            <a:extLst xmlns:a="http://schemas.openxmlformats.org/drawingml/2006/main">
+              <a:ext uri="{FF2B5EF4-FFF2-40B4-BE49-F238E27FC236}">
+                <a16:creationId xmlns:a16="http://schemas.microsoft.com/office/drawing/2014/main" id="{C1E6FDC3-F436-4D8D-BF07-9B0F03608DC6}"/>
+              </a:ext>
+            </a:extLst>
+          </p:cNvPr>
+          <p:cNvSpPr>
+            <a:spLocks xmlns:a="http://schemas.openxmlformats.org/drawingml/2006/main" noGrp="1"/>
+          </p:cNvSpPr>
+          <p:nvPr/>
+        </p:nvSpPr>
+        <p:spPr>
+          <a:xfrm xmlns:a="http://schemas.openxmlformats.org/drawingml/2006/main" rot="5400000">
+            <a:off x="4914900" y="2771775"/>
+            <a:ext cx="3314700" cy="19050"/>
+          </a:xfrm>
+          <a:prstGeom xmlns:a="http://schemas.openxmlformats.org/drawingml/2006/main" prst="rect">
+            <a:avLst/>
+          </a:prstGeom>
+          <a:solidFill xmlns:a="http://schemas.openxmlformats.org/drawingml/2006/main">
+            <a:srgbClr val="D6DDE2"/>
+          </a:solidFill>
+          <a:ln xmlns:a="http://schemas.openxmlformats.org/drawingml/2006/main" w="0">
+            <a:noFill/>
+            <a:prstDash val="solid"/>
+          </a:ln>
+        </p:spPr>
+      </p:sp>
+      <p:sp>
+        <p:nvSpPr>
+          <p:cNvPr id="13" name="p13right">
+            <a:extLst xmlns:a="http://schemas.openxmlformats.org/drawingml/2006/main">
+              <a:ext uri="{FF2B5EF4-FFF2-40B4-BE49-F238E27FC236}">
+                <a16:creationId xmlns:a16="http://schemas.microsoft.com/office/drawing/2014/main" id="{FE29B9BD-9F98-4F85-B8F3-7CDAEDAB579B}"/>
+              </a:ext>
+            </a:extLst>
+          </p:cNvPr>
+          <p:cNvSpPr>
+            <a:spLocks xmlns:a="http://schemas.openxmlformats.org/drawingml/2006/main" noGrp="1"/>
+          </p:cNvSpPr>
+          <p:nvPr/>
+        </p:nvSpPr>
+        <p:spPr>
+          <a:xfrm xmlns:a="http://schemas.openxmlformats.org/drawingml/2006/main">
+            <a:off x="7181850" y="1104900"/>
+            <a:ext cx="4038600" cy="3143250"/>
           </a:xfrm>
           <a:prstGeom xmlns:a="http://schemas.openxmlformats.org/drawingml/2006/main" prst="roundRect">
             <a:avLst>
-              <a:gd name="adj" fmla="val 12903"/>
+              <a:gd name="adj" fmla="val 2424"/>
             </a:avLst>
           </a:prstGeom>
           <a:solidFill xmlns:a="http://schemas.openxmlformats.org/drawingml/2006/main">
-            <a:srgbClr val="18354E"/>
+            <a:srgbClr val="E8F0F6"/>
           </a:solidFill>
           <a:ln xmlns:a="http://schemas.openxmlformats.org/drawingml/2006/main" w="0">
             <a:noFill/>
@@ -7732,114 +7978,178 @@
           <a:p xmlns:a="http://schemas.openxmlformats.org/drawingml/2006/main">
             <a:pPr algn="ctr">
               <a:lnSpc>
-                <a:spcPct val="110000"/>
-              </a:lnSpc>
-              <a:buNone/>
-              <a:defRPr sz="1350" b="1">
-                <a:solidFill>
-                  <a:srgbClr val="FFFFFF"/>
-                </a:solidFill>
-              </a:defRPr>
-            </a:pPr>
-            <a:r>
-              <a:rPr sz="1350" b="1">
-                <a:solidFill>
-                  <a:srgbClr val="FFFFFF"/>
-                </a:solidFill>
-                <a:latin typeface="Microsoft YaHei"/>
-                <a:ea typeface="Microsoft YaHei"/>
-                <a:cs typeface="Microsoft YaHei"/>
-              </a:rPr>
-              <a:t>65-82</a:t>
-            </a:r>
-          </a:p>
-        </p:txBody>
-      </p:sp>
-      <p:sp>
-        <p:nvSpPr>
-          <p:cNvPr id="12" name="p142b">
-            <a:extLst xmlns:a="http://schemas.openxmlformats.org/drawingml/2006/main">
-              <a:ext uri="{FF2B5EF4-FFF2-40B4-BE49-F238E27FC236}">
-                <a16:creationId xmlns:a16="http://schemas.microsoft.com/office/drawing/2014/main" id="{344CE81C-0C30-4658-93A5-C0BD08C509E5}"/>
-              </a:ext>
-            </a:extLst>
-          </p:cNvPr>
-          <p:cNvSpPr>
-            <a:spLocks xmlns:a="http://schemas.openxmlformats.org/drawingml/2006/main" noGrp="1"/>
-          </p:cNvSpPr>
-          <p:nvPr/>
-        </p:nvSpPr>
-        <p:spPr>
-          <a:xfrm xmlns:a="http://schemas.openxmlformats.org/drawingml/2006/main">
-            <a:off x="2286000" y="3048000"/>
-            <a:ext cx="8572500" cy="590550"/>
+                <a:spcPct val="125000"/>
+              </a:lnSpc>
+              <a:buNone/>
+              <a:defRPr sz="1725" b="1">
+                <a:solidFill>
+                  <a:srgbClr val="18354E"/>
+                </a:solidFill>
+              </a:defRPr>
+            </a:pPr>
+            <a:r>
+              <a:rPr sz="1725" b="1">
+                <a:solidFill>
+                  <a:srgbClr val="18354E"/>
+                </a:solidFill>
+                <a:latin typeface="Microsoft YaHei"/>
+                <a:ea typeface="Microsoft YaHei"/>
+                <a:cs typeface="Microsoft YaHei"/>
+              </a:rPr>
+              <a:t>第 16 课合并检查</a:t>
+            </a:r>
+          </a:p>
+          <a:p xmlns:a="http://schemas.openxmlformats.org/drawingml/2006/main">
+            <a:r>
+              <a:t/>
+            </a:r>
+          </a:p>
+          <a:p xmlns:a="http://schemas.openxmlformats.org/drawingml/2006/main">
+            <a:pPr algn="ctr">
+              <a:lnSpc>
+                <a:spcPct val="125000"/>
+              </a:lnSpc>
+              <a:buNone/>
+              <a:defRPr sz="1725" b="1">
+                <a:solidFill>
+                  <a:srgbClr val="18354E"/>
+                </a:solidFill>
+              </a:defRPr>
+            </a:pPr>
+            <a:r>
+              <a:rPr sz="1725" b="1">
+                <a:solidFill>
+                  <a:srgbClr val="18354E"/>
+                </a:solidFill>
+                <a:latin typeface="Microsoft YaHei"/>
+                <a:ea typeface="Microsoft YaHei"/>
+                <a:cs typeface="Microsoft YaHei"/>
+              </a:rPr>
+              <a:t>论文式短文定稿</a:t>
+            </a:r>
+          </a:p>
+          <a:p xmlns:a="http://schemas.openxmlformats.org/drawingml/2006/main">
+            <a:pPr algn="ctr">
+              <a:lnSpc>
+                <a:spcPct val="125000"/>
+              </a:lnSpc>
+              <a:buNone/>
+              <a:defRPr sz="1725" b="1">
+                <a:solidFill>
+                  <a:srgbClr val="18354E"/>
+                </a:solidFill>
+              </a:defRPr>
+            </a:pPr>
+            <a:r>
+              <a:rPr sz="1725" b="1">
+                <a:solidFill>
+                  <a:srgbClr val="18354E"/>
+                </a:solidFill>
+                <a:latin typeface="Microsoft YaHei"/>
+                <a:ea typeface="Microsoft YaHei"/>
+                <a:cs typeface="Microsoft YaHei"/>
+              </a:rPr>
+              <a:t>同行评审处理记录</a:t>
+            </a:r>
+          </a:p>
+          <a:p xmlns:a="http://schemas.openxmlformats.org/drawingml/2006/main">
+            <a:pPr algn="ctr">
+              <a:lnSpc>
+                <a:spcPct val="125000"/>
+              </a:lnSpc>
+              <a:buNone/>
+              <a:defRPr sz="1725" b="1">
+                <a:solidFill>
+                  <a:srgbClr val="18354E"/>
+                </a:solidFill>
+              </a:defRPr>
+            </a:pPr>
+            <a:r>
+              <a:rPr sz="1725" b="1">
+                <a:solidFill>
+                  <a:srgbClr val="18354E"/>
+                </a:solidFill>
+                <a:latin typeface="Microsoft YaHei"/>
+                <a:ea typeface="Microsoft YaHei"/>
+                <a:cs typeface="Microsoft YaHei"/>
+              </a:rPr>
+              <a:t>复现与 Workflow 材料</a:t>
+            </a:r>
+          </a:p>
+          <a:p xmlns:a="http://schemas.openxmlformats.org/drawingml/2006/main">
+            <a:pPr algn="ctr">
+              <a:lnSpc>
+                <a:spcPct val="125000"/>
+              </a:lnSpc>
+              <a:buNone/>
+              <a:defRPr sz="1725" b="1">
+                <a:solidFill>
+                  <a:srgbClr val="18354E"/>
+                </a:solidFill>
+              </a:defRPr>
+            </a:pPr>
+            <a:r>
+              <a:rPr sz="1725" b="1">
+                <a:solidFill>
+                  <a:srgbClr val="18354E"/>
+                </a:solidFill>
+                <a:latin typeface="Microsoft YaHei"/>
+                <a:ea typeface="Microsoft YaHei"/>
+                <a:cs typeface="Microsoft YaHei"/>
+              </a:rPr>
+              <a:t>伦理 / AI 披露</a:t>
+            </a:r>
+          </a:p>
+          <a:p xmlns:a="http://schemas.openxmlformats.org/drawingml/2006/main">
+            <a:pPr algn="ctr">
+              <a:lnSpc>
+                <a:spcPct val="125000"/>
+              </a:lnSpc>
+              <a:buNone/>
+              <a:defRPr sz="1725" b="1">
+                <a:solidFill>
+                  <a:srgbClr val="18354E"/>
+                </a:solidFill>
+              </a:defRPr>
+            </a:pPr>
+            <a:r>
+              <a:rPr sz="1725" b="1">
+                <a:solidFill>
+                  <a:srgbClr val="18354E"/>
+                </a:solidFill>
+                <a:latin typeface="Microsoft YaHei"/>
+                <a:ea typeface="Microsoft YaHei"/>
+                <a:cs typeface="Microsoft YaHei"/>
+              </a:rPr>
+              <a:t>个人展示与抽查</a:t>
+            </a:r>
+          </a:p>
+        </p:txBody>
+      </p:sp>
+      <p:sp>
+        <p:nvSpPr>
+          <p:cNvPr id="14" name="p13c">
+            <a:extLst xmlns:a="http://schemas.openxmlformats.org/drawingml/2006/main">
+              <a:ext uri="{FF2B5EF4-FFF2-40B4-BE49-F238E27FC236}">
+                <a16:creationId xmlns:a16="http://schemas.microsoft.com/office/drawing/2014/main" id="{803C4B33-759F-4E71-B570-BBAAE43C6CC8}"/>
+              </a:ext>
+            </a:extLst>
+          </p:cNvPr>
+          <p:cNvSpPr>
+            <a:spLocks xmlns:a="http://schemas.openxmlformats.org/drawingml/2006/main" noGrp="1"/>
+          </p:cNvSpPr>
+          <p:nvPr/>
+        </p:nvSpPr>
+        <p:spPr>
+          <a:xfrm xmlns:a="http://schemas.openxmlformats.org/drawingml/2006/main">
+            <a:off x="1428750" y="4953000"/>
+            <a:ext cx="9334500" cy="533400"/>
           </a:xfrm>
           <a:prstGeom xmlns:a="http://schemas.openxmlformats.org/drawingml/2006/main" prst="rect">
             <a:avLst/>
           </a:prstGeom>
           <a:solidFill xmlns:a="http://schemas.openxmlformats.org/drawingml/2006/main">
-            <a:srgbClr val="F3F6F7"/>
-          </a:solidFill>
-          <a:ln xmlns:a="http://schemas.openxmlformats.org/drawingml/2006/main" w="0">
-            <a:noFill/>
-            <a:prstDash val="solid"/>
-          </a:ln>
-        </p:spPr>
-        <p:txBody>
-          <a:bodyPr xmlns:a="http://schemas.openxmlformats.org/drawingml/2006/main" lIns="76200" tIns="38100" rIns="76200" bIns="38100" anchor="ctr"/>
-          <a:lstStyle xmlns:a="http://schemas.openxmlformats.org/drawingml/2006/main"/>
-          <a:p xmlns:a="http://schemas.openxmlformats.org/drawingml/2006/main">
-            <a:pPr algn="l">
-              <a:lnSpc>
-                <a:spcPct val="110000"/>
-              </a:lnSpc>
-              <a:buNone/>
-              <a:defRPr sz="1500" b="1">
-                <a:solidFill>
-                  <a:srgbClr val="263746"/>
-                </a:solidFill>
-              </a:defRPr>
-            </a:pPr>
-            <a:r>
-              <a:rPr sz="1500" b="1">
-                <a:solidFill>
-                  <a:srgbClr val="263746"/>
-                </a:solidFill>
-                <a:latin typeface="Microsoft YaHei"/>
-                <a:ea typeface="Microsoft YaHei"/>
-                <a:cs typeface="Microsoft YaHei"/>
-              </a:rPr>
-              <a:t>十项预检  →  revision-plan.md</a:t>
-            </a:r>
-          </a:p>
-        </p:txBody>
-      </p:sp>
-      <p:sp>
-        <p:nvSpPr>
-          <p:cNvPr id="13" name="p143a">
-            <a:extLst xmlns:a="http://schemas.openxmlformats.org/drawingml/2006/main">
-              <a:ext uri="{FF2B5EF4-FFF2-40B4-BE49-F238E27FC236}">
-                <a16:creationId xmlns:a16="http://schemas.microsoft.com/office/drawing/2014/main" id="{EC7D8E39-85C7-438B-AC94-8B1B34B613A1}"/>
-              </a:ext>
-            </a:extLst>
-          </p:cNvPr>
-          <p:cNvSpPr>
-            <a:spLocks xmlns:a="http://schemas.openxmlformats.org/drawingml/2006/main" noGrp="1"/>
-          </p:cNvSpPr>
-          <p:nvPr/>
-        </p:nvSpPr>
-        <p:spPr>
-          <a:xfrm xmlns:a="http://schemas.openxmlformats.org/drawingml/2006/main">
-            <a:off x="723900" y="3981450"/>
-            <a:ext cx="1428750" cy="590550"/>
-          </a:xfrm>
-          <a:prstGeom xmlns:a="http://schemas.openxmlformats.org/drawingml/2006/main" prst="roundRect">
-            <a:avLst>
-              <a:gd name="adj" fmla="val 12903"/>
-            </a:avLst>
-          </a:prstGeom>
-          <a:solidFill xmlns:a="http://schemas.openxmlformats.org/drawingml/2006/main">
-            <a:srgbClr val="C8161E"/>
+            <a:srgbClr val="F8E9EA"/>
           </a:solidFill>
           <a:ln xmlns:a="http://schemas.openxmlformats.org/drawingml/2006/main" w="0">
             <a:noFill/>
@@ -7855,124 +8165,6 @@
                 <a:spcPct val="110000"/>
               </a:lnSpc>
               <a:buNone/>
-              <a:defRPr sz="1350" b="1">
-                <a:solidFill>
-                  <a:srgbClr val="FFFFFF"/>
-                </a:solidFill>
-              </a:defRPr>
-            </a:pPr>
-            <a:r>
-              <a:rPr sz="1350" b="1">
-                <a:solidFill>
-                  <a:srgbClr val="FFFFFF"/>
-                </a:solidFill>
-                <a:latin typeface="Microsoft YaHei"/>
-                <a:ea typeface="Microsoft YaHei"/>
-                <a:cs typeface="Microsoft YaHei"/>
-              </a:rPr>
-              <a:t>82-90</a:t>
-            </a:r>
-          </a:p>
-        </p:txBody>
-      </p:sp>
-      <p:sp>
-        <p:nvSpPr>
-          <p:cNvPr id="14" name="p143b">
-            <a:extLst xmlns:a="http://schemas.openxmlformats.org/drawingml/2006/main">
-              <a:ext uri="{FF2B5EF4-FFF2-40B4-BE49-F238E27FC236}">
-                <a16:creationId xmlns:a16="http://schemas.microsoft.com/office/drawing/2014/main" id="{29342215-2872-4C1A-B9A6-84F5837352B1}"/>
-              </a:ext>
-            </a:extLst>
-          </p:cNvPr>
-          <p:cNvSpPr>
-            <a:spLocks xmlns:a="http://schemas.openxmlformats.org/drawingml/2006/main" noGrp="1"/>
-          </p:cNvSpPr>
-          <p:nvPr/>
-        </p:nvSpPr>
-        <p:spPr>
-          <a:xfrm xmlns:a="http://schemas.openxmlformats.org/drawingml/2006/main">
-            <a:off x="2286000" y="3981450"/>
-            <a:ext cx="8572500" cy="590550"/>
-          </a:xfrm>
-          <a:prstGeom xmlns:a="http://schemas.openxmlformats.org/drawingml/2006/main" prst="rect">
-            <a:avLst/>
-          </a:prstGeom>
-          <a:solidFill xmlns:a="http://schemas.openxmlformats.org/drawingml/2006/main">
-            <a:srgbClr val="F8E9EA"/>
-          </a:solidFill>
-          <a:ln xmlns:a="http://schemas.openxmlformats.org/drawingml/2006/main" w="0">
-            <a:noFill/>
-            <a:prstDash val="solid"/>
-          </a:ln>
-        </p:spPr>
-        <p:txBody>
-          <a:bodyPr xmlns:a="http://schemas.openxmlformats.org/drawingml/2006/main" lIns="76200" tIns="38100" rIns="76200" bIns="38100" anchor="ctr"/>
-          <a:lstStyle xmlns:a="http://schemas.openxmlformats.org/drawingml/2006/main"/>
-          <a:p xmlns:a="http://schemas.openxmlformats.org/drawingml/2006/main">
-            <a:pPr algn="l">
-              <a:lnSpc>
-                <a:spcPct val="110000"/>
-              </a:lnSpc>
-              <a:buNone/>
-              <a:defRPr sz="1500" b="1">
-                <a:solidFill>
-                  <a:srgbClr val="263746"/>
-                </a:solidFill>
-              </a:defRPr>
-            </a:pPr>
-            <a:r>
-              <a:rPr sz="1500" b="1">
-                <a:solidFill>
-                  <a:srgbClr val="263746"/>
-                </a:solidFill>
-                <a:latin typeface="Microsoft YaHei"/>
-                <a:ea typeface="Microsoft YaHei"/>
-                <a:cs typeface="Microsoft YaHei"/>
-              </a:rPr>
-              <a:t>致命 / 重要 / 表达  →  revision-plan.md</a:t>
-            </a:r>
-          </a:p>
-        </p:txBody>
-      </p:sp>
-      <p:sp>
-        <p:nvSpPr>
-          <p:cNvPr id="15" name="p14c">
-            <a:extLst xmlns:a="http://schemas.openxmlformats.org/drawingml/2006/main">
-              <a:ext uri="{FF2B5EF4-FFF2-40B4-BE49-F238E27FC236}">
-                <a16:creationId xmlns:a16="http://schemas.microsoft.com/office/drawing/2014/main" id="{649BB41F-B809-4C74-B52B-89FC9E456327}"/>
-              </a:ext>
-            </a:extLst>
-          </p:cNvPr>
-          <p:cNvSpPr>
-            <a:spLocks xmlns:a="http://schemas.openxmlformats.org/drawingml/2006/main" noGrp="1"/>
-          </p:cNvSpPr>
-          <p:nvPr/>
-        </p:nvSpPr>
-        <p:spPr>
-          <a:xfrm xmlns:a="http://schemas.openxmlformats.org/drawingml/2006/main">
-            <a:off x="1428750" y="5010150"/>
-            <a:ext cx="9334500" cy="533400"/>
-          </a:xfrm>
-          <a:prstGeom xmlns:a="http://schemas.openxmlformats.org/drawingml/2006/main" prst="rect">
-            <a:avLst/>
-          </a:prstGeom>
-          <a:solidFill xmlns:a="http://schemas.openxmlformats.org/drawingml/2006/main">
-            <a:srgbClr val="F8E9EA"/>
-          </a:solidFill>
-          <a:ln xmlns:a="http://schemas.openxmlformats.org/drawingml/2006/main" w="0">
-            <a:noFill/>
-            <a:prstDash val="solid"/>
-          </a:ln>
-        </p:spPr>
-        <p:txBody>
-          <a:bodyPr xmlns:a="http://schemas.openxmlformats.org/drawingml/2006/main" lIns="76200" tIns="38100" rIns="76200" bIns="38100" anchor="ctr"/>
-          <a:lstStyle xmlns:a="http://schemas.openxmlformats.org/drawingml/2006/main"/>
-          <a:p xmlns:a="http://schemas.openxmlformats.org/drawingml/2006/main">
-            <a:pPr algn="ctr">
-              <a:lnSpc>
-                <a:spcPct val="110000"/>
-              </a:lnSpc>
-              <a:buNone/>
               <a:defRPr sz="1650" b="1">
                 <a:solidFill>
                   <a:srgbClr val="C8161E"/>
@@ -7988,7 +8180,7 @@
                 <a:ea typeface="Microsoft YaHei"/>
                 <a:cs typeface="Microsoft YaHei"/>
               </a:rPr>
-              <a:t>所有工件写回个人项目，不形成共同提交。</a:t>
+              <a:t>本课不正式提交；保存当前个人项目版本与缺口清单。</a:t>
             </a:r>
           </a:p>
         </p:txBody>
@@ -8056,7 +8248,7 @@
                 <a:ea typeface="Microsoft YaHei"/>
                 <a:cs typeface="Microsoft YaHei"/>
               </a:rPr>
-              <a:t>备用：把泛化评审改写为可执行意见</a:t>
+              <a:t>备用：实践轮次与工件写回索引</a:t>
             </a:r>
             <a:endParaRPr/>
           </a:p>
@@ -8095,36 +8287,34 @@
           <p:cNvPr id="6" name="lab">
             <a:extLst xmlns:a="http://schemas.openxmlformats.org/drawingml/2006/main">
               <a:ext uri="{FF2B5EF4-FFF2-40B4-BE49-F238E27FC236}">
-                <a16:creationId xmlns:a16="http://schemas.microsoft.com/office/drawing/2014/main" id="{B8EEC58D-791B-41F3-9165-DF5D65A397FE}"/>
-              </a:ext>
-            </a:extLst>
-          </p:cNvPr>
-          <p:cNvSpPr>
-            <a:spLocks xmlns:a="http://schemas.openxmlformats.org/drawingml/2006/main" noGrp="1"/>
-          </p:cNvSpPr>
-          <p:nvPr/>
-        </p:nvSpPr>
-        <p:spPr>
-          <a:xfrm xmlns:a="http://schemas.openxmlformats.org/drawingml/2006/main">
-            <a:off x="6953250" y="781050"/>
-            <a:ext cx="4610100" cy="438150"/>
+                <a16:creationId xmlns:a16="http://schemas.microsoft.com/office/drawing/2014/main" id="{A82CDC4D-8BD0-4EE1-BA66-C5C6042E89A7}"/>
+              </a:ext>
+            </a:extLst>
+          </p:cNvPr>
+          <p:cNvSpPr>
+            <a:spLocks xmlns:a="http://schemas.openxmlformats.org/drawingml/2006/main" noGrp="1"/>
+          </p:cNvSpPr>
+          <p:nvPr/>
+        </p:nvSpPr>
+        <p:spPr>
+          <a:xfrm xmlns:a="http://schemas.openxmlformats.org/drawingml/2006/main">
+            <a:off x="9144000" y="838200"/>
+            <a:ext cx="2419350" cy="304800"/>
           </a:xfrm>
           <a:prstGeom xmlns:a="http://schemas.openxmlformats.org/drawingml/2006/main" prst="rect">
             <a:avLst/>
           </a:prstGeom>
-          <a:solidFill xmlns:a="http://schemas.openxmlformats.org/drawingml/2006/main">
-            <a:srgbClr val="F8E9EA"/>
-          </a:solidFill>
-          <a:ln xmlns:a="http://schemas.openxmlformats.org/drawingml/2006/main" w="0">
-            <a:noFill/>
-            <a:prstDash val="solid"/>
-          </a:ln>
-        </p:spPr>
-        <p:txBody>
-          <a:bodyPr xmlns:a="http://schemas.openxmlformats.org/drawingml/2006/main" lIns="76200" tIns="38100" rIns="76200" bIns="38100" anchor="ctr"/>
-          <a:lstStyle xmlns:a="http://schemas.openxmlformats.org/drawingml/2006/main"/>
-          <a:p xmlns:a="http://schemas.openxmlformats.org/drawingml/2006/main">
-            <a:pPr algn="ctr">
+          <a:noFill xmlns:a="http://schemas.openxmlformats.org/drawingml/2006/main"/>
+          <a:ln xmlns:a="http://schemas.openxmlformats.org/drawingml/2006/main" w="0">
+            <a:noFill/>
+            <a:prstDash val="solid"/>
+          </a:ln>
+        </p:spPr>
+        <p:txBody>
+          <a:bodyPr xmlns:a="http://schemas.openxmlformats.org/drawingml/2006/main" lIns="76200" tIns="38100" rIns="76200" bIns="38100" anchor="ctr"/>
+          <a:lstStyle xmlns:a="http://schemas.openxmlformats.org/drawingml/2006/main"/>
+          <a:p xmlns:a="http://schemas.openxmlformats.org/drawingml/2006/main">
+            <a:pPr algn="r">
               <a:lnSpc>
                 <a:spcPct val="110000"/>
               </a:lnSpc>
@@ -8136,7 +8326,7 @@
               </a:defRPr>
             </a:pPr>
             <a:r>
-              <a:rPr sz="1800" b="1">
+              <a:rPr sz="1125" b="1">
                 <a:solidFill>
                   <a:srgbClr val="C8161E"/>
                 </a:solidFill>
@@ -8144,37 +8334,37 @@
                 <a:ea typeface="Microsoft YaHei"/>
                 <a:cs typeface="Microsoft YaHei"/>
               </a:rPr>
-              <a:t>教师构造虚构评审｜非真实意见</a:t>
-            </a:r>
-          </a:p>
-        </p:txBody>
-      </p:sp>
-      <p:sp>
-        <p:nvSpPr>
-          <p:cNvPr id="7" name="bad">
-            <a:extLst xmlns:a="http://schemas.openxmlformats.org/drawingml/2006/main">
-              <a:ext uri="{FF2B5EF4-FFF2-40B4-BE49-F238E27FC236}">
-                <a16:creationId xmlns:a16="http://schemas.microsoft.com/office/drawing/2014/main" id="{83626EEC-6836-4BFD-88C0-5085FA7D7179}"/>
-              </a:ext>
-            </a:extLst>
-          </p:cNvPr>
-          <p:cNvSpPr>
-            <a:spLocks xmlns:a="http://schemas.openxmlformats.org/drawingml/2006/main" noGrp="1"/>
-          </p:cNvSpPr>
-          <p:nvPr/>
-        </p:nvSpPr>
-        <p:spPr>
-          <a:xfrm xmlns:a="http://schemas.openxmlformats.org/drawingml/2006/main">
-            <a:off x="723900" y="1581150"/>
-            <a:ext cx="4000500" cy="1143000"/>
+              <a:t>备用页｜不计入主节奏</a:t>
+            </a:r>
+          </a:p>
+        </p:txBody>
+      </p:sp>
+      <p:sp>
+        <p:nvSpPr>
+          <p:cNvPr id="7" name="p140a">
+            <a:extLst xmlns:a="http://schemas.openxmlformats.org/drawingml/2006/main">
+              <a:ext uri="{FF2B5EF4-FFF2-40B4-BE49-F238E27FC236}">
+                <a16:creationId xmlns:a16="http://schemas.microsoft.com/office/drawing/2014/main" id="{A76B09FB-426D-4FFE-9C57-5739A40507A1}"/>
+              </a:ext>
+            </a:extLst>
+          </p:cNvPr>
+          <p:cNvSpPr>
+            <a:spLocks xmlns:a="http://schemas.openxmlformats.org/drawingml/2006/main" noGrp="1"/>
+          </p:cNvSpPr>
+          <p:nvPr/>
+        </p:nvSpPr>
+        <p:spPr>
+          <a:xfrm xmlns:a="http://schemas.openxmlformats.org/drawingml/2006/main">
+            <a:off x="723900" y="1181100"/>
+            <a:ext cx="1428750" cy="590550"/>
           </a:xfrm>
           <a:prstGeom xmlns:a="http://schemas.openxmlformats.org/drawingml/2006/main" prst="roundRect">
             <a:avLst>
-              <a:gd name="adj" fmla="val 6667"/>
+              <a:gd name="adj" fmla="val 12903"/>
             </a:avLst>
           </a:prstGeom>
           <a:solidFill xmlns:a="http://schemas.openxmlformats.org/drawingml/2006/main">
-            <a:srgbClr val="F8E9EA"/>
+            <a:srgbClr val="18354E"/>
           </a:solidFill>
           <a:ln xmlns:a="http://schemas.openxmlformats.org/drawingml/2006/main" w="0">
             <a:noFill/>
@@ -8190,109 +8380,111 @@
                 <a:spcPct val="110000"/>
               </a:lnSpc>
               <a:buNone/>
-              <a:defRPr sz="2550" b="1">
-                <a:solidFill>
-                  <a:srgbClr val="C8161E"/>
-                </a:solidFill>
-              </a:defRPr>
-            </a:pPr>
-            <a:r>
-              <a:rPr sz="2550" b="1">
-                <a:solidFill>
-                  <a:srgbClr val="C8161E"/>
-                </a:solidFill>
-                <a:latin typeface="Microsoft YaHei"/>
-                <a:ea typeface="Microsoft YaHei"/>
-                <a:cs typeface="Microsoft YaHei"/>
-              </a:rPr>
-              <a:t>“论证不严谨。”</a:t>
-            </a:r>
-          </a:p>
-        </p:txBody>
-      </p:sp>
-      <p:sp>
-        <p:nvSpPr>
-          <p:cNvPr id="8" name="arr">
-            <a:extLst xmlns:a="http://schemas.openxmlformats.org/drawingml/2006/main">
-              <a:ext uri="{FF2B5EF4-FFF2-40B4-BE49-F238E27FC236}">
-                <a16:creationId xmlns:a16="http://schemas.microsoft.com/office/drawing/2014/main" id="{4C06E76E-3846-4E23-8D40-0916348B6F16}"/>
-              </a:ext>
-            </a:extLst>
-          </p:cNvPr>
-          <p:cNvSpPr>
-            <a:spLocks xmlns:a="http://schemas.openxmlformats.org/drawingml/2006/main" noGrp="1"/>
-          </p:cNvSpPr>
-          <p:nvPr/>
-        </p:nvSpPr>
-        <p:spPr>
-          <a:xfrm xmlns:a="http://schemas.openxmlformats.org/drawingml/2006/main">
-            <a:off x="5048250" y="1809750"/>
-            <a:ext cx="857250" cy="704850"/>
+              <a:defRPr sz="1350" b="1">
+                <a:solidFill>
+                  <a:srgbClr val="FFFFFF"/>
+                </a:solidFill>
+              </a:defRPr>
+            </a:pPr>
+            <a:r>
+              <a:rPr sz="1350" b="1">
+                <a:solidFill>
+                  <a:srgbClr val="FFFFFF"/>
+                </a:solidFill>
+                <a:latin typeface="Microsoft YaHei"/>
+                <a:ea typeface="Microsoft YaHei"/>
+                <a:cs typeface="Microsoft YaHei"/>
+              </a:rPr>
+              <a:t>35-50</a:t>
+            </a:r>
+          </a:p>
+        </p:txBody>
+      </p:sp>
+      <p:sp>
+        <p:nvSpPr>
+          <p:cNvPr id="8" name="p140b">
+            <a:extLst xmlns:a="http://schemas.openxmlformats.org/drawingml/2006/main">
+              <a:ext uri="{FF2B5EF4-FFF2-40B4-BE49-F238E27FC236}">
+                <a16:creationId xmlns:a16="http://schemas.microsoft.com/office/drawing/2014/main" id="{D4C99E43-5D93-4EB7-AA41-7DF3D8FBABA5}"/>
+              </a:ext>
+            </a:extLst>
+          </p:cNvPr>
+          <p:cNvSpPr>
+            <a:spLocks xmlns:a="http://schemas.openxmlformats.org/drawingml/2006/main" noGrp="1"/>
+          </p:cNvSpPr>
+          <p:nvPr/>
+        </p:nvSpPr>
+        <p:spPr>
+          <a:xfrm xmlns:a="http://schemas.openxmlformats.org/drawingml/2006/main">
+            <a:off x="2286000" y="1181100"/>
+            <a:ext cx="8572500" cy="590550"/>
           </a:xfrm>
           <a:prstGeom xmlns:a="http://schemas.openxmlformats.org/drawingml/2006/main" prst="rect">
             <a:avLst/>
           </a:prstGeom>
-          <a:noFill xmlns:a="http://schemas.openxmlformats.org/drawingml/2006/main"/>
-          <a:ln xmlns:a="http://schemas.openxmlformats.org/drawingml/2006/main" w="0">
-            <a:noFill/>
-            <a:prstDash val="solid"/>
-          </a:ln>
-        </p:spPr>
-        <p:txBody>
-          <a:bodyPr xmlns:a="http://schemas.openxmlformats.org/drawingml/2006/main" lIns="76200" tIns="38100" rIns="76200" bIns="38100" anchor="ctr"/>
-          <a:lstStyle xmlns:a="http://schemas.openxmlformats.org/drawingml/2006/main"/>
-          <a:p xmlns:a="http://schemas.openxmlformats.org/drawingml/2006/main">
-            <a:pPr algn="ctr">
-              <a:lnSpc>
-                <a:spcPct val="110000"/>
-              </a:lnSpc>
-              <a:buNone/>
-              <a:defRPr sz="3000" b="1">
-                <a:solidFill>
-                  <a:srgbClr val="C8161E"/>
-                </a:solidFill>
-              </a:defRPr>
-            </a:pPr>
-            <a:r>
-              <a:rPr sz="3000" b="1">
-                <a:solidFill>
-                  <a:srgbClr val="C8161E"/>
-                </a:solidFill>
-                <a:latin typeface="Microsoft YaHei"/>
-                <a:ea typeface="Microsoft YaHei"/>
-                <a:cs typeface="Microsoft YaHei"/>
-              </a:rPr>
-              <a:t>→</a:t>
-            </a:r>
-          </a:p>
-        </p:txBody>
-      </p:sp>
-      <p:sp>
-        <p:nvSpPr>
-          <p:cNvPr id="9" name="good">
-            <a:extLst xmlns:a="http://schemas.openxmlformats.org/drawingml/2006/main">
-              <a:ext uri="{FF2B5EF4-FFF2-40B4-BE49-F238E27FC236}">
-                <a16:creationId xmlns:a16="http://schemas.microsoft.com/office/drawing/2014/main" id="{F005DB25-C8E9-4C1E-8A89-79E2AF10B6ED}"/>
-              </a:ext>
-            </a:extLst>
-          </p:cNvPr>
-          <p:cNvSpPr>
-            <a:spLocks xmlns:a="http://schemas.openxmlformats.org/drawingml/2006/main" noGrp="1"/>
-          </p:cNvSpPr>
-          <p:nvPr/>
-        </p:nvSpPr>
-        <p:spPr>
-          <a:xfrm xmlns:a="http://schemas.openxmlformats.org/drawingml/2006/main">
-            <a:off x="6229350" y="1390650"/>
-            <a:ext cx="5162550" cy="1714500"/>
+          <a:solidFill xmlns:a="http://schemas.openxmlformats.org/drawingml/2006/main">
+            <a:srgbClr val="F3F6F7"/>
+          </a:solidFill>
+          <a:ln xmlns:a="http://schemas.openxmlformats.org/drawingml/2006/main" w="0">
+            <a:noFill/>
+            <a:prstDash val="solid"/>
+          </a:ln>
+        </p:spPr>
+        <p:txBody>
+          <a:bodyPr xmlns:a="http://schemas.openxmlformats.org/drawingml/2006/main" lIns="76200" tIns="38100" rIns="76200" bIns="38100" anchor="ctr"/>
+          <a:lstStyle xmlns:a="http://schemas.openxmlformats.org/drawingml/2006/main"/>
+          <a:p xmlns:a="http://schemas.openxmlformats.org/drawingml/2006/main">
+            <a:pPr algn="l">
+              <a:lnSpc>
+                <a:spcPct val="110000"/>
+              </a:lnSpc>
+              <a:buNone/>
+              <a:defRPr sz="1500" b="1">
+                <a:solidFill>
+                  <a:srgbClr val="263746"/>
+                </a:solidFill>
+              </a:defRPr>
+            </a:pPr>
+            <a:r>
+              <a:rPr sz="1500" b="1">
+                <a:solidFill>
+                  <a:srgbClr val="263746"/>
+                </a:solidFill>
+                <a:latin typeface="Microsoft YaHei"/>
+                <a:ea typeface="Microsoft YaHei"/>
+                <a:cs typeface="Microsoft YaHei"/>
+              </a:rPr>
+              <a:t>评 1 位同伴 + 三问  →  peer-review.md</a:t>
+            </a:r>
+          </a:p>
+        </p:txBody>
+      </p:sp>
+      <p:sp>
+        <p:nvSpPr>
+          <p:cNvPr id="9" name="p141a">
+            <a:extLst xmlns:a="http://schemas.openxmlformats.org/drawingml/2006/main">
+              <a:ext uri="{FF2B5EF4-FFF2-40B4-BE49-F238E27FC236}">
+                <a16:creationId xmlns:a16="http://schemas.microsoft.com/office/drawing/2014/main" id="{DDDA4BEB-8874-4DA4-BA7E-473152CCB5F5}"/>
+              </a:ext>
+            </a:extLst>
+          </p:cNvPr>
+          <p:cNvSpPr>
+            <a:spLocks xmlns:a="http://schemas.openxmlformats.org/drawingml/2006/main" noGrp="1"/>
+          </p:cNvSpPr>
+          <p:nvPr/>
+        </p:nvSpPr>
+        <p:spPr>
+          <a:xfrm xmlns:a="http://schemas.openxmlformats.org/drawingml/2006/main">
+            <a:off x="723900" y="2114550"/>
+            <a:ext cx="1428750" cy="590550"/>
           </a:xfrm>
           <a:prstGeom xmlns:a="http://schemas.openxmlformats.org/drawingml/2006/main" prst="roundRect">
             <a:avLst>
-              <a:gd name="adj" fmla="val 4444"/>
+              <a:gd name="adj" fmla="val 12903"/>
             </a:avLst>
           </a:prstGeom>
           <a:solidFill xmlns:a="http://schemas.openxmlformats.org/drawingml/2006/main">
-            <a:srgbClr val="E8F0F6"/>
+            <a:srgbClr val="18354E"/>
           </a:solidFill>
           <a:ln xmlns:a="http://schemas.openxmlformats.org/drawingml/2006/main" w="0">
             <a:noFill/>
@@ -8305,51 +8497,110 @@
           <a:p xmlns:a="http://schemas.openxmlformats.org/drawingml/2006/main">
             <a:pPr algn="ctr">
               <a:lnSpc>
-                <a:spcPct val="130000"/>
-              </a:lnSpc>
-              <a:buNone/>
-              <a:defRPr sz="1800" b="1">
-                <a:solidFill>
-                  <a:srgbClr val="18354E"/>
-                </a:solidFill>
-              </a:defRPr>
-            </a:pPr>
-            <a:r>
-              <a:rPr sz="1800" b="1">
-                <a:solidFill>
-                  <a:srgbClr val="18354E"/>
-                </a:solidFill>
-                <a:latin typeface="Microsoft YaHei"/>
-                <a:ea typeface="Microsoft YaHei"/>
-                <a:cs typeface="Microsoft YaHei"/>
-              </a:rPr>
-              <a:t>“短文 §3 的主结论没有绑定实验 ID；结果不可追溯，可能挡住论证门。建议先补 ID 与结论追踪表链接。”</a:t>
-            </a:r>
-          </a:p>
-        </p:txBody>
-      </p:sp>
-      <p:sp>
-        <p:nvSpPr>
-          <p:cNvPr id="10" name="p150">
-            <a:extLst xmlns:a="http://schemas.openxmlformats.org/drawingml/2006/main">
-              <a:ext uri="{FF2B5EF4-FFF2-40B4-BE49-F238E27FC236}">
-                <a16:creationId xmlns:a16="http://schemas.microsoft.com/office/drawing/2014/main" id="{E9C6E02D-4537-4B8E-9D1F-7DFDD1F294C8}"/>
-              </a:ext>
-            </a:extLst>
-          </p:cNvPr>
-          <p:cNvSpPr>
-            <a:spLocks xmlns:a="http://schemas.openxmlformats.org/drawingml/2006/main" noGrp="1"/>
-          </p:cNvSpPr>
-          <p:nvPr/>
-        </p:nvSpPr>
-        <p:spPr>
-          <a:xfrm xmlns:a="http://schemas.openxmlformats.org/drawingml/2006/main">
-            <a:off x="1771650" y="3848100"/>
-            <a:ext cx="1866900" cy="514350"/>
+                <a:spcPct val="110000"/>
+              </a:lnSpc>
+              <a:buNone/>
+              <a:defRPr sz="1350" b="1">
+                <a:solidFill>
+                  <a:srgbClr val="FFFFFF"/>
+                </a:solidFill>
+              </a:defRPr>
+            </a:pPr>
+            <a:r>
+              <a:rPr sz="1350" b="1">
+                <a:solidFill>
+                  <a:srgbClr val="FFFFFF"/>
+                </a:solidFill>
+                <a:latin typeface="Microsoft YaHei"/>
+                <a:ea typeface="Microsoft YaHei"/>
+                <a:cs typeface="Microsoft YaHei"/>
+              </a:rPr>
+              <a:t>50-65</a:t>
+            </a:r>
+          </a:p>
+        </p:txBody>
+      </p:sp>
+      <p:sp>
+        <p:nvSpPr>
+          <p:cNvPr id="10" name="p141b">
+            <a:extLst xmlns:a="http://schemas.openxmlformats.org/drawingml/2006/main">
+              <a:ext uri="{FF2B5EF4-FFF2-40B4-BE49-F238E27FC236}">
+                <a16:creationId xmlns:a16="http://schemas.microsoft.com/office/drawing/2014/main" id="{FF86E8E0-5713-4F7B-9553-C4F41ECB65E4}"/>
+              </a:ext>
+            </a:extLst>
+          </p:cNvPr>
+          <p:cNvSpPr>
+            <a:spLocks xmlns:a="http://schemas.openxmlformats.org/drawingml/2006/main" noGrp="1"/>
+          </p:cNvSpPr>
+          <p:nvPr/>
+        </p:nvSpPr>
+        <p:spPr>
+          <a:xfrm xmlns:a="http://schemas.openxmlformats.org/drawingml/2006/main">
+            <a:off x="2286000" y="2114550"/>
+            <a:ext cx="8572500" cy="590550"/>
+          </a:xfrm>
+          <a:prstGeom xmlns:a="http://schemas.openxmlformats.org/drawingml/2006/main" prst="rect">
+            <a:avLst/>
+          </a:prstGeom>
+          <a:solidFill xmlns:a="http://schemas.openxmlformats.org/drawingml/2006/main">
+            <a:srgbClr val="F3F6F7"/>
+          </a:solidFill>
+          <a:ln xmlns:a="http://schemas.openxmlformats.org/drawingml/2006/main" w="0">
+            <a:noFill/>
+            <a:prstDash val="solid"/>
+          </a:ln>
+        </p:spPr>
+        <p:txBody>
+          <a:bodyPr xmlns:a="http://schemas.openxmlformats.org/drawingml/2006/main" lIns="76200" tIns="38100" rIns="76200" bIns="38100" anchor="ctr"/>
+          <a:lstStyle xmlns:a="http://schemas.openxmlformats.org/drawingml/2006/main"/>
+          <a:p xmlns:a="http://schemas.openxmlformats.org/drawingml/2006/main">
+            <a:pPr algn="l">
+              <a:lnSpc>
+                <a:spcPct val="110000"/>
+              </a:lnSpc>
+              <a:buNone/>
+              <a:defRPr sz="1500" b="1">
+                <a:solidFill>
+                  <a:srgbClr val="263746"/>
+                </a:solidFill>
+              </a:defRPr>
+            </a:pPr>
+            <a:r>
+              <a:rPr sz="1500" b="1">
+                <a:solidFill>
+                  <a:srgbClr val="263746"/>
+                </a:solidFill>
+                <a:latin typeface="Microsoft YaHei"/>
+                <a:ea typeface="Microsoft YaHei"/>
+                <a:cs typeface="Microsoft YaHei"/>
+              </a:rPr>
+              <a:t>写 ≥2 条作者回应  →  peer-review.md</a:t>
+            </a:r>
+          </a:p>
+        </p:txBody>
+      </p:sp>
+      <p:sp>
+        <p:nvSpPr>
+          <p:cNvPr id="11" name="p142a">
+            <a:extLst xmlns:a="http://schemas.openxmlformats.org/drawingml/2006/main">
+              <a:ext uri="{FF2B5EF4-FFF2-40B4-BE49-F238E27FC236}">
+                <a16:creationId xmlns:a16="http://schemas.microsoft.com/office/drawing/2014/main" id="{C939D0F2-7961-4E48-99B6-219755D26909}"/>
+              </a:ext>
+            </a:extLst>
+          </p:cNvPr>
+          <p:cNvSpPr>
+            <a:spLocks xmlns:a="http://schemas.openxmlformats.org/drawingml/2006/main" noGrp="1"/>
+          </p:cNvSpPr>
+          <p:nvPr/>
+        </p:nvSpPr>
+        <p:spPr>
+          <a:xfrm xmlns:a="http://schemas.openxmlformats.org/drawingml/2006/main">
+            <a:off x="723900" y="3048000"/>
+            <a:ext cx="1428750" cy="590550"/>
           </a:xfrm>
           <a:prstGeom xmlns:a="http://schemas.openxmlformats.org/drawingml/2006/main" prst="roundRect">
             <a:avLst>
-              <a:gd name="adj" fmla="val 14815"/>
+              <a:gd name="adj" fmla="val 12903"/>
             </a:avLst>
           </a:prstGeom>
           <a:solidFill xmlns:a="http://schemas.openxmlformats.org/drawingml/2006/main">
@@ -8384,37 +8635,96 @@
                 <a:ea typeface="Microsoft YaHei"/>
                 <a:cs typeface="Microsoft YaHei"/>
               </a:rPr>
-              <a:t>具体条目</a:t>
-            </a:r>
-          </a:p>
-        </p:txBody>
-      </p:sp>
-      <p:sp>
-        <p:nvSpPr>
-          <p:cNvPr id="11" name="p151">
-            <a:extLst xmlns:a="http://schemas.openxmlformats.org/drawingml/2006/main">
-              <a:ext uri="{FF2B5EF4-FFF2-40B4-BE49-F238E27FC236}">
-                <a16:creationId xmlns:a16="http://schemas.microsoft.com/office/drawing/2014/main" id="{05673596-56B6-4686-BB69-2A978E4BF1FA}"/>
-              </a:ext>
-            </a:extLst>
-          </p:cNvPr>
-          <p:cNvSpPr>
-            <a:spLocks xmlns:a="http://schemas.openxmlformats.org/drawingml/2006/main" noGrp="1"/>
-          </p:cNvSpPr>
-          <p:nvPr/>
-        </p:nvSpPr>
-        <p:spPr>
-          <a:xfrm xmlns:a="http://schemas.openxmlformats.org/drawingml/2006/main">
-            <a:off x="4076700" y="3848100"/>
-            <a:ext cx="1866900" cy="514350"/>
+              <a:t>65-82</a:t>
+            </a:r>
+          </a:p>
+        </p:txBody>
+      </p:sp>
+      <p:sp>
+        <p:nvSpPr>
+          <p:cNvPr id="12" name="p142b">
+            <a:extLst xmlns:a="http://schemas.openxmlformats.org/drawingml/2006/main">
+              <a:ext uri="{FF2B5EF4-FFF2-40B4-BE49-F238E27FC236}">
+                <a16:creationId xmlns:a16="http://schemas.microsoft.com/office/drawing/2014/main" id="{344CE81C-0C30-4658-93A5-C0BD08C509E5}"/>
+              </a:ext>
+            </a:extLst>
+          </p:cNvPr>
+          <p:cNvSpPr>
+            <a:spLocks xmlns:a="http://schemas.openxmlformats.org/drawingml/2006/main" noGrp="1"/>
+          </p:cNvSpPr>
+          <p:nvPr/>
+        </p:nvSpPr>
+        <p:spPr>
+          <a:xfrm xmlns:a="http://schemas.openxmlformats.org/drawingml/2006/main">
+            <a:off x="2286000" y="3048000"/>
+            <a:ext cx="8572500" cy="590550"/>
+          </a:xfrm>
+          <a:prstGeom xmlns:a="http://schemas.openxmlformats.org/drawingml/2006/main" prst="rect">
+            <a:avLst/>
+          </a:prstGeom>
+          <a:solidFill xmlns:a="http://schemas.openxmlformats.org/drawingml/2006/main">
+            <a:srgbClr val="F3F6F7"/>
+          </a:solidFill>
+          <a:ln xmlns:a="http://schemas.openxmlformats.org/drawingml/2006/main" w="0">
+            <a:noFill/>
+            <a:prstDash val="solid"/>
+          </a:ln>
+        </p:spPr>
+        <p:txBody>
+          <a:bodyPr xmlns:a="http://schemas.openxmlformats.org/drawingml/2006/main" lIns="76200" tIns="38100" rIns="76200" bIns="38100" anchor="ctr"/>
+          <a:lstStyle xmlns:a="http://schemas.openxmlformats.org/drawingml/2006/main"/>
+          <a:p xmlns:a="http://schemas.openxmlformats.org/drawingml/2006/main">
+            <a:pPr algn="l">
+              <a:lnSpc>
+                <a:spcPct val="110000"/>
+              </a:lnSpc>
+              <a:buNone/>
+              <a:defRPr sz="1500" b="1">
+                <a:solidFill>
+                  <a:srgbClr val="263746"/>
+                </a:solidFill>
+              </a:defRPr>
+            </a:pPr>
+            <a:r>
+              <a:rPr sz="1500" b="1">
+                <a:solidFill>
+                  <a:srgbClr val="263746"/>
+                </a:solidFill>
+                <a:latin typeface="Microsoft YaHei"/>
+                <a:ea typeface="Microsoft YaHei"/>
+                <a:cs typeface="Microsoft YaHei"/>
+              </a:rPr>
+              <a:t>十项预检  →  revision-plan.md</a:t>
+            </a:r>
+          </a:p>
+        </p:txBody>
+      </p:sp>
+      <p:sp>
+        <p:nvSpPr>
+          <p:cNvPr id="13" name="p143a">
+            <a:extLst xmlns:a="http://schemas.openxmlformats.org/drawingml/2006/main">
+              <a:ext uri="{FF2B5EF4-FFF2-40B4-BE49-F238E27FC236}">
+                <a16:creationId xmlns:a16="http://schemas.microsoft.com/office/drawing/2014/main" id="{EC7D8E39-85C7-438B-AC94-8B1B34B613A1}"/>
+              </a:ext>
+            </a:extLst>
+          </p:cNvPr>
+          <p:cNvSpPr>
+            <a:spLocks xmlns:a="http://schemas.openxmlformats.org/drawingml/2006/main" noGrp="1"/>
+          </p:cNvSpPr>
+          <p:nvPr/>
+        </p:nvSpPr>
+        <p:spPr>
+          <a:xfrm xmlns:a="http://schemas.openxmlformats.org/drawingml/2006/main">
+            <a:off x="723900" y="3981450"/>
+            <a:ext cx="1428750" cy="590550"/>
           </a:xfrm>
           <a:prstGeom xmlns:a="http://schemas.openxmlformats.org/drawingml/2006/main" prst="roundRect">
             <a:avLst>
-              <a:gd name="adj" fmla="val 14815"/>
+              <a:gd name="adj" fmla="val 12903"/>
             </a:avLst>
           </a:prstGeom>
           <a:solidFill xmlns:a="http://schemas.openxmlformats.org/drawingml/2006/main">
-            <a:srgbClr val="18354E"/>
+            <a:srgbClr val="C8161E"/>
           </a:solidFill>
           <a:ln xmlns:a="http://schemas.openxmlformats.org/drawingml/2006/main" w="0">
             <a:noFill/>
@@ -8445,151 +8755,29 @@
                 <a:ea typeface="Microsoft YaHei"/>
                 <a:cs typeface="Microsoft YaHei"/>
               </a:rPr>
-              <a:t>rubric 维度</a:t>
-            </a:r>
-          </a:p>
-        </p:txBody>
-      </p:sp>
-      <p:sp>
-        <p:nvSpPr>
-          <p:cNvPr id="12" name="p152">
-            <a:extLst xmlns:a="http://schemas.openxmlformats.org/drawingml/2006/main">
-              <a:ext uri="{FF2B5EF4-FFF2-40B4-BE49-F238E27FC236}">
-                <a16:creationId xmlns:a16="http://schemas.microsoft.com/office/drawing/2014/main" id="{F5199848-DF72-4373-9D63-BFF4DD3B8EF9}"/>
-              </a:ext>
-            </a:extLst>
-          </p:cNvPr>
-          <p:cNvSpPr>
-            <a:spLocks xmlns:a="http://schemas.openxmlformats.org/drawingml/2006/main" noGrp="1"/>
-          </p:cNvSpPr>
-          <p:nvPr/>
-        </p:nvSpPr>
-        <p:spPr>
-          <a:xfrm xmlns:a="http://schemas.openxmlformats.org/drawingml/2006/main">
-            <a:off x="6381750" y="3848100"/>
-            <a:ext cx="1866900" cy="514350"/>
-          </a:xfrm>
-          <a:prstGeom xmlns:a="http://schemas.openxmlformats.org/drawingml/2006/main" prst="roundRect">
-            <a:avLst>
-              <a:gd name="adj" fmla="val 14815"/>
-            </a:avLst>
-          </a:prstGeom>
-          <a:solidFill xmlns:a="http://schemas.openxmlformats.org/drawingml/2006/main">
-            <a:srgbClr val="C8161E"/>
-          </a:solidFill>
-          <a:ln xmlns:a="http://schemas.openxmlformats.org/drawingml/2006/main" w="0">
-            <a:noFill/>
-            <a:prstDash val="solid"/>
-          </a:ln>
-        </p:spPr>
-        <p:txBody>
-          <a:bodyPr xmlns:a="http://schemas.openxmlformats.org/drawingml/2006/main" lIns="76200" tIns="38100" rIns="76200" bIns="38100" anchor="ctr"/>
-          <a:lstStyle xmlns:a="http://schemas.openxmlformats.org/drawingml/2006/main"/>
-          <a:p xmlns:a="http://schemas.openxmlformats.org/drawingml/2006/main">
-            <a:pPr algn="ctr">
-              <a:lnSpc>
-                <a:spcPct val="110000"/>
-              </a:lnSpc>
-              <a:buNone/>
-              <a:defRPr sz="1350" b="1">
-                <a:solidFill>
-                  <a:srgbClr val="FFFFFF"/>
-                </a:solidFill>
-              </a:defRPr>
-            </a:pPr>
-            <a:r>
-              <a:rPr sz="1350" b="1">
-                <a:solidFill>
-                  <a:srgbClr val="FFFFFF"/>
-                </a:solidFill>
-                <a:latin typeface="Microsoft YaHei"/>
-                <a:ea typeface="Microsoft YaHei"/>
-                <a:cs typeface="Microsoft YaHei"/>
-              </a:rPr>
-              <a:t>风险等级</a:t>
-            </a:r>
-          </a:p>
-        </p:txBody>
-      </p:sp>
-      <p:sp>
-        <p:nvSpPr>
-          <p:cNvPr id="13" name="p153">
-            <a:extLst xmlns:a="http://schemas.openxmlformats.org/drawingml/2006/main">
-              <a:ext uri="{FF2B5EF4-FFF2-40B4-BE49-F238E27FC236}">
-                <a16:creationId xmlns:a16="http://schemas.microsoft.com/office/drawing/2014/main" id="{6B9662F0-F335-4269-8E8E-B92F5CC32B8B}"/>
-              </a:ext>
-            </a:extLst>
-          </p:cNvPr>
-          <p:cNvSpPr>
-            <a:spLocks xmlns:a="http://schemas.openxmlformats.org/drawingml/2006/main" noGrp="1"/>
-          </p:cNvSpPr>
-          <p:nvPr/>
-        </p:nvSpPr>
-        <p:spPr>
-          <a:xfrm xmlns:a="http://schemas.openxmlformats.org/drawingml/2006/main">
-            <a:off x="8686800" y="3848100"/>
-            <a:ext cx="1866900" cy="514350"/>
-          </a:xfrm>
-          <a:prstGeom xmlns:a="http://schemas.openxmlformats.org/drawingml/2006/main" prst="roundRect">
-            <a:avLst>
-              <a:gd name="adj" fmla="val 14815"/>
-            </a:avLst>
-          </a:prstGeom>
-          <a:solidFill xmlns:a="http://schemas.openxmlformats.org/drawingml/2006/main">
-            <a:srgbClr val="18354E"/>
-          </a:solidFill>
-          <a:ln xmlns:a="http://schemas.openxmlformats.org/drawingml/2006/main" w="0">
-            <a:noFill/>
-            <a:prstDash val="solid"/>
-          </a:ln>
-        </p:spPr>
-        <p:txBody>
-          <a:bodyPr xmlns:a="http://schemas.openxmlformats.org/drawingml/2006/main" lIns="76200" tIns="38100" rIns="76200" bIns="38100" anchor="ctr"/>
-          <a:lstStyle xmlns:a="http://schemas.openxmlformats.org/drawingml/2006/main"/>
-          <a:p xmlns:a="http://schemas.openxmlformats.org/drawingml/2006/main">
-            <a:pPr algn="ctr">
-              <a:lnSpc>
-                <a:spcPct val="110000"/>
-              </a:lnSpc>
-              <a:buNone/>
-              <a:defRPr sz="1350" b="1">
-                <a:solidFill>
-                  <a:srgbClr val="FFFFFF"/>
-                </a:solidFill>
-              </a:defRPr>
-            </a:pPr>
-            <a:r>
-              <a:rPr sz="1350" b="1">
-                <a:solidFill>
-                  <a:srgbClr val="FFFFFF"/>
-                </a:solidFill>
-                <a:latin typeface="Microsoft YaHei"/>
-                <a:ea typeface="Microsoft YaHei"/>
-                <a:cs typeface="Microsoft YaHei"/>
-              </a:rPr>
-              <a:t>可执行动作</a:t>
-            </a:r>
-          </a:p>
-        </p:txBody>
-      </p:sp>
-      <p:sp>
-        <p:nvSpPr>
-          <p:cNvPr id="14" name="p15c">
-            <a:extLst xmlns:a="http://schemas.openxmlformats.org/drawingml/2006/main">
-              <a:ext uri="{FF2B5EF4-FFF2-40B4-BE49-F238E27FC236}">
-                <a16:creationId xmlns:a16="http://schemas.microsoft.com/office/drawing/2014/main" id="{7497CE18-3517-47A7-BB22-9BB76D1B277D}"/>
-              </a:ext>
-            </a:extLst>
-          </p:cNvPr>
-          <p:cNvSpPr>
-            <a:spLocks xmlns:a="http://schemas.openxmlformats.org/drawingml/2006/main" noGrp="1"/>
-          </p:cNvSpPr>
-          <p:nvPr/>
-        </p:nvSpPr>
-        <p:spPr>
-          <a:xfrm xmlns:a="http://schemas.openxmlformats.org/drawingml/2006/main">
-            <a:off x="1428750" y="4857750"/>
-            <a:ext cx="9334500" cy="533400"/>
+              <a:t>82-90</a:t>
+            </a:r>
+          </a:p>
+        </p:txBody>
+      </p:sp>
+      <p:sp>
+        <p:nvSpPr>
+          <p:cNvPr id="14" name="p143b">
+            <a:extLst xmlns:a="http://schemas.openxmlformats.org/drawingml/2006/main">
+              <a:ext uri="{FF2B5EF4-FFF2-40B4-BE49-F238E27FC236}">
+                <a16:creationId xmlns:a16="http://schemas.microsoft.com/office/drawing/2014/main" id="{29342215-2872-4C1A-B9A6-84F5837352B1}"/>
+              </a:ext>
+            </a:extLst>
+          </p:cNvPr>
+          <p:cNvSpPr>
+            <a:spLocks xmlns:a="http://schemas.openxmlformats.org/drawingml/2006/main" noGrp="1"/>
+          </p:cNvSpPr>
+          <p:nvPr/>
+        </p:nvSpPr>
+        <p:spPr>
+          <a:xfrm xmlns:a="http://schemas.openxmlformats.org/drawingml/2006/main">
+            <a:off x="2286000" y="3981450"/>
+            <a:ext cx="8572500" cy="590550"/>
           </a:xfrm>
           <a:prstGeom xmlns:a="http://schemas.openxmlformats.org/drawingml/2006/main" prst="rect">
             <a:avLst/>
@@ -8606,6 +8794,65 @@
           <a:bodyPr xmlns:a="http://schemas.openxmlformats.org/drawingml/2006/main" lIns="76200" tIns="38100" rIns="76200" bIns="38100" anchor="ctr"/>
           <a:lstStyle xmlns:a="http://schemas.openxmlformats.org/drawingml/2006/main"/>
           <a:p xmlns:a="http://schemas.openxmlformats.org/drawingml/2006/main">
+            <a:pPr algn="l">
+              <a:lnSpc>
+                <a:spcPct val="110000"/>
+              </a:lnSpc>
+              <a:buNone/>
+              <a:defRPr sz="1500" b="1">
+                <a:solidFill>
+                  <a:srgbClr val="263746"/>
+                </a:solidFill>
+              </a:defRPr>
+            </a:pPr>
+            <a:r>
+              <a:rPr sz="1500" b="1">
+                <a:solidFill>
+                  <a:srgbClr val="263746"/>
+                </a:solidFill>
+                <a:latin typeface="Microsoft YaHei"/>
+                <a:ea typeface="Microsoft YaHei"/>
+                <a:cs typeface="Microsoft YaHei"/>
+              </a:rPr>
+              <a:t>致命 / 重要 / 表达  →  revision-plan.md</a:t>
+            </a:r>
+          </a:p>
+        </p:txBody>
+      </p:sp>
+      <p:sp>
+        <p:nvSpPr>
+          <p:cNvPr id="15" name="p14c">
+            <a:extLst xmlns:a="http://schemas.openxmlformats.org/drawingml/2006/main">
+              <a:ext uri="{FF2B5EF4-FFF2-40B4-BE49-F238E27FC236}">
+                <a16:creationId xmlns:a16="http://schemas.microsoft.com/office/drawing/2014/main" id="{649BB41F-B809-4C74-B52B-89FC9E456327}"/>
+              </a:ext>
+            </a:extLst>
+          </p:cNvPr>
+          <p:cNvSpPr>
+            <a:spLocks xmlns:a="http://schemas.openxmlformats.org/drawingml/2006/main" noGrp="1"/>
+          </p:cNvSpPr>
+          <p:nvPr/>
+        </p:nvSpPr>
+        <p:spPr>
+          <a:xfrm xmlns:a="http://schemas.openxmlformats.org/drawingml/2006/main">
+            <a:off x="1428750" y="5010150"/>
+            <a:ext cx="9334500" cy="533400"/>
+          </a:xfrm>
+          <a:prstGeom xmlns:a="http://schemas.openxmlformats.org/drawingml/2006/main" prst="rect">
+            <a:avLst/>
+          </a:prstGeom>
+          <a:solidFill xmlns:a="http://schemas.openxmlformats.org/drawingml/2006/main">
+            <a:srgbClr val="F8E9EA"/>
+          </a:solidFill>
+          <a:ln xmlns:a="http://schemas.openxmlformats.org/drawingml/2006/main" w="0">
+            <a:noFill/>
+            <a:prstDash val="solid"/>
+          </a:ln>
+        </p:spPr>
+        <p:txBody>
+          <a:bodyPr xmlns:a="http://schemas.openxmlformats.org/drawingml/2006/main" lIns="76200" tIns="38100" rIns="76200" bIns="38100" anchor="ctr"/>
+          <a:lstStyle xmlns:a="http://schemas.openxmlformats.org/drawingml/2006/main"/>
+          <a:p xmlns:a="http://schemas.openxmlformats.org/drawingml/2006/main">
             <a:pPr algn="ctr">
               <a:lnSpc>
                 <a:spcPct val="110000"/>
@@ -8626,7 +8873,7 @@
                 <a:ea typeface="Microsoft YaHei"/>
                 <a:cs typeface="Microsoft YaHei"/>
               </a:rPr>
-              <a:t>从评价人，改为描述工作、风险与最小动作。</a:t>
+              <a:t>所有工件写回个人项目，不形成共同提交。</a:t>
             </a:r>
           </a:p>
         </p:txBody>
@@ -8694,7 +8941,7 @@
                 <a:ea typeface="Microsoft YaHei"/>
                 <a:cs typeface="Microsoft YaHei"/>
               </a:rPr>
-              <a:t>备用退出卡：作者保留最终决定权</a:t>
+              <a:t>备用：把泛化评审改写为可执行意见</a:t>
             </a:r>
             <a:endParaRPr/>
           </a:p>
@@ -8723,6 +8970,644 @@
           <a:p xmlns:a="http://schemas.openxmlformats.org/drawingml/2006/main">
             <a:fld id="{DC9C7607-4BA3-B4DC-A00F-2E67A9FCFF7E}" type="slidenum">
               <a:t>16</a:t>
+            </a:fld>
+            <a:endParaRPr/>
+          </a:p>
+        </p:txBody>
+      </p:sp>
+      <p:sp>
+        <p:nvSpPr>
+          <p:cNvPr id="6" name="lab">
+            <a:extLst xmlns:a="http://schemas.openxmlformats.org/drawingml/2006/main">
+              <a:ext uri="{FF2B5EF4-FFF2-40B4-BE49-F238E27FC236}">
+                <a16:creationId xmlns:a16="http://schemas.microsoft.com/office/drawing/2014/main" id="{B8EEC58D-791B-41F3-9165-DF5D65A397FE}"/>
+              </a:ext>
+            </a:extLst>
+          </p:cNvPr>
+          <p:cNvSpPr>
+            <a:spLocks xmlns:a="http://schemas.openxmlformats.org/drawingml/2006/main" noGrp="1"/>
+          </p:cNvSpPr>
+          <p:nvPr/>
+        </p:nvSpPr>
+        <p:spPr>
+          <a:xfrm xmlns:a="http://schemas.openxmlformats.org/drawingml/2006/main">
+            <a:off x="6953250" y="781050"/>
+            <a:ext cx="4610100" cy="438150"/>
+          </a:xfrm>
+          <a:prstGeom xmlns:a="http://schemas.openxmlformats.org/drawingml/2006/main" prst="rect">
+            <a:avLst/>
+          </a:prstGeom>
+          <a:solidFill xmlns:a="http://schemas.openxmlformats.org/drawingml/2006/main">
+            <a:srgbClr val="F8E9EA"/>
+          </a:solidFill>
+          <a:ln xmlns:a="http://schemas.openxmlformats.org/drawingml/2006/main" w="0">
+            <a:noFill/>
+            <a:prstDash val="solid"/>
+          </a:ln>
+        </p:spPr>
+        <p:txBody>
+          <a:bodyPr xmlns:a="http://schemas.openxmlformats.org/drawingml/2006/main" lIns="76200" tIns="38100" rIns="76200" bIns="38100" anchor="ctr"/>
+          <a:lstStyle xmlns:a="http://schemas.openxmlformats.org/drawingml/2006/main"/>
+          <a:p xmlns:a="http://schemas.openxmlformats.org/drawingml/2006/main">
+            <a:pPr algn="ctr">
+              <a:lnSpc>
+                <a:spcPct val="110000"/>
+              </a:lnSpc>
+              <a:buNone/>
+              <a:defRPr sz="1125" b="1">
+                <a:solidFill>
+                  <a:srgbClr val="C8161E"/>
+                </a:solidFill>
+              </a:defRPr>
+            </a:pPr>
+            <a:r>
+              <a:rPr sz="1800" b="1">
+                <a:solidFill>
+                  <a:srgbClr val="C8161E"/>
+                </a:solidFill>
+                <a:latin typeface="Microsoft YaHei"/>
+                <a:ea typeface="Microsoft YaHei"/>
+                <a:cs typeface="Microsoft YaHei"/>
+              </a:rPr>
+              <a:t>教师构造虚构评审｜非真实意见</a:t>
+            </a:r>
+          </a:p>
+        </p:txBody>
+      </p:sp>
+      <p:sp>
+        <p:nvSpPr>
+          <p:cNvPr id="7" name="bad">
+            <a:extLst xmlns:a="http://schemas.openxmlformats.org/drawingml/2006/main">
+              <a:ext uri="{FF2B5EF4-FFF2-40B4-BE49-F238E27FC236}">
+                <a16:creationId xmlns:a16="http://schemas.microsoft.com/office/drawing/2014/main" id="{83626EEC-6836-4BFD-88C0-5085FA7D7179}"/>
+              </a:ext>
+            </a:extLst>
+          </p:cNvPr>
+          <p:cNvSpPr>
+            <a:spLocks xmlns:a="http://schemas.openxmlformats.org/drawingml/2006/main" noGrp="1"/>
+          </p:cNvSpPr>
+          <p:nvPr/>
+        </p:nvSpPr>
+        <p:spPr>
+          <a:xfrm xmlns:a="http://schemas.openxmlformats.org/drawingml/2006/main">
+            <a:off x="723900" y="1581150"/>
+            <a:ext cx="4000500" cy="1143000"/>
+          </a:xfrm>
+          <a:prstGeom xmlns:a="http://schemas.openxmlformats.org/drawingml/2006/main" prst="roundRect">
+            <a:avLst>
+              <a:gd name="adj" fmla="val 6667"/>
+            </a:avLst>
+          </a:prstGeom>
+          <a:solidFill xmlns:a="http://schemas.openxmlformats.org/drawingml/2006/main">
+            <a:srgbClr val="F8E9EA"/>
+          </a:solidFill>
+          <a:ln xmlns:a="http://schemas.openxmlformats.org/drawingml/2006/main" w="0">
+            <a:noFill/>
+            <a:prstDash val="solid"/>
+          </a:ln>
+        </p:spPr>
+        <p:txBody>
+          <a:bodyPr xmlns:a="http://schemas.openxmlformats.org/drawingml/2006/main" lIns="76200" tIns="38100" rIns="76200" bIns="38100" anchor="ctr"/>
+          <a:lstStyle xmlns:a="http://schemas.openxmlformats.org/drawingml/2006/main"/>
+          <a:p xmlns:a="http://schemas.openxmlformats.org/drawingml/2006/main">
+            <a:pPr algn="ctr">
+              <a:lnSpc>
+                <a:spcPct val="110000"/>
+              </a:lnSpc>
+              <a:buNone/>
+              <a:defRPr sz="2550" b="1">
+                <a:solidFill>
+                  <a:srgbClr val="C8161E"/>
+                </a:solidFill>
+              </a:defRPr>
+            </a:pPr>
+            <a:r>
+              <a:rPr sz="2550" b="1">
+                <a:solidFill>
+                  <a:srgbClr val="C8161E"/>
+                </a:solidFill>
+                <a:latin typeface="Microsoft YaHei"/>
+                <a:ea typeface="Microsoft YaHei"/>
+                <a:cs typeface="Microsoft YaHei"/>
+              </a:rPr>
+              <a:t>“论证不严谨。”</a:t>
+            </a:r>
+          </a:p>
+        </p:txBody>
+      </p:sp>
+      <p:sp>
+        <p:nvSpPr>
+          <p:cNvPr id="8" name="arr">
+            <a:extLst xmlns:a="http://schemas.openxmlformats.org/drawingml/2006/main">
+              <a:ext uri="{FF2B5EF4-FFF2-40B4-BE49-F238E27FC236}">
+                <a16:creationId xmlns:a16="http://schemas.microsoft.com/office/drawing/2014/main" id="{4C06E76E-3846-4E23-8D40-0916348B6F16}"/>
+              </a:ext>
+            </a:extLst>
+          </p:cNvPr>
+          <p:cNvSpPr>
+            <a:spLocks xmlns:a="http://schemas.openxmlformats.org/drawingml/2006/main" noGrp="1"/>
+          </p:cNvSpPr>
+          <p:nvPr/>
+        </p:nvSpPr>
+        <p:spPr>
+          <a:xfrm xmlns:a="http://schemas.openxmlformats.org/drawingml/2006/main">
+            <a:off x="5048250" y="1809750"/>
+            <a:ext cx="857250" cy="704850"/>
+          </a:xfrm>
+          <a:prstGeom xmlns:a="http://schemas.openxmlformats.org/drawingml/2006/main" prst="rect">
+            <a:avLst/>
+          </a:prstGeom>
+          <a:noFill xmlns:a="http://schemas.openxmlformats.org/drawingml/2006/main"/>
+          <a:ln xmlns:a="http://schemas.openxmlformats.org/drawingml/2006/main" w="0">
+            <a:noFill/>
+            <a:prstDash val="solid"/>
+          </a:ln>
+        </p:spPr>
+        <p:txBody>
+          <a:bodyPr xmlns:a="http://schemas.openxmlformats.org/drawingml/2006/main" lIns="76200" tIns="38100" rIns="76200" bIns="38100" anchor="ctr"/>
+          <a:lstStyle xmlns:a="http://schemas.openxmlformats.org/drawingml/2006/main"/>
+          <a:p xmlns:a="http://schemas.openxmlformats.org/drawingml/2006/main">
+            <a:pPr algn="ctr">
+              <a:lnSpc>
+                <a:spcPct val="110000"/>
+              </a:lnSpc>
+              <a:buNone/>
+              <a:defRPr sz="3000" b="1">
+                <a:solidFill>
+                  <a:srgbClr val="C8161E"/>
+                </a:solidFill>
+              </a:defRPr>
+            </a:pPr>
+            <a:r>
+              <a:rPr sz="3000" b="1">
+                <a:solidFill>
+                  <a:srgbClr val="C8161E"/>
+                </a:solidFill>
+                <a:latin typeface="Microsoft YaHei"/>
+                <a:ea typeface="Microsoft YaHei"/>
+                <a:cs typeface="Microsoft YaHei"/>
+              </a:rPr>
+              <a:t>→</a:t>
+            </a:r>
+          </a:p>
+        </p:txBody>
+      </p:sp>
+      <p:sp>
+        <p:nvSpPr>
+          <p:cNvPr id="9" name="good">
+            <a:extLst xmlns:a="http://schemas.openxmlformats.org/drawingml/2006/main">
+              <a:ext uri="{FF2B5EF4-FFF2-40B4-BE49-F238E27FC236}">
+                <a16:creationId xmlns:a16="http://schemas.microsoft.com/office/drawing/2014/main" id="{F005DB25-C8E9-4C1E-8A89-79E2AF10B6ED}"/>
+              </a:ext>
+            </a:extLst>
+          </p:cNvPr>
+          <p:cNvSpPr>
+            <a:spLocks xmlns:a="http://schemas.openxmlformats.org/drawingml/2006/main" noGrp="1"/>
+          </p:cNvSpPr>
+          <p:nvPr/>
+        </p:nvSpPr>
+        <p:spPr>
+          <a:xfrm xmlns:a="http://schemas.openxmlformats.org/drawingml/2006/main">
+            <a:off x="6229350" y="1390650"/>
+            <a:ext cx="5162550" cy="1714500"/>
+          </a:xfrm>
+          <a:prstGeom xmlns:a="http://schemas.openxmlformats.org/drawingml/2006/main" prst="roundRect">
+            <a:avLst>
+              <a:gd name="adj" fmla="val 4444"/>
+            </a:avLst>
+          </a:prstGeom>
+          <a:solidFill xmlns:a="http://schemas.openxmlformats.org/drawingml/2006/main">
+            <a:srgbClr val="E8F0F6"/>
+          </a:solidFill>
+          <a:ln xmlns:a="http://schemas.openxmlformats.org/drawingml/2006/main" w="0">
+            <a:noFill/>
+            <a:prstDash val="solid"/>
+          </a:ln>
+        </p:spPr>
+        <p:txBody>
+          <a:bodyPr xmlns:a="http://schemas.openxmlformats.org/drawingml/2006/main" lIns="76200" tIns="38100" rIns="76200" bIns="38100" anchor="ctr"/>
+          <a:lstStyle xmlns:a="http://schemas.openxmlformats.org/drawingml/2006/main"/>
+          <a:p xmlns:a="http://schemas.openxmlformats.org/drawingml/2006/main">
+            <a:pPr algn="ctr">
+              <a:lnSpc>
+                <a:spcPct val="130000"/>
+              </a:lnSpc>
+              <a:buNone/>
+              <a:defRPr sz="1800" b="1">
+                <a:solidFill>
+                  <a:srgbClr val="18354E"/>
+                </a:solidFill>
+              </a:defRPr>
+            </a:pPr>
+            <a:r>
+              <a:rPr sz="1800" b="1">
+                <a:solidFill>
+                  <a:srgbClr val="18354E"/>
+                </a:solidFill>
+                <a:latin typeface="Microsoft YaHei"/>
+                <a:ea typeface="Microsoft YaHei"/>
+                <a:cs typeface="Microsoft YaHei"/>
+              </a:rPr>
+              <a:t>“短文 §3 的主结论没有绑定实验 ID；结果不可追溯，可能挡住论证门。建议先补 ID 与结论追踪表链接。”</a:t>
+            </a:r>
+          </a:p>
+        </p:txBody>
+      </p:sp>
+      <p:sp>
+        <p:nvSpPr>
+          <p:cNvPr id="10" name="p150">
+            <a:extLst xmlns:a="http://schemas.openxmlformats.org/drawingml/2006/main">
+              <a:ext uri="{FF2B5EF4-FFF2-40B4-BE49-F238E27FC236}">
+                <a16:creationId xmlns:a16="http://schemas.microsoft.com/office/drawing/2014/main" id="{E9C6E02D-4537-4B8E-9D1F-7DFDD1F294C8}"/>
+              </a:ext>
+            </a:extLst>
+          </p:cNvPr>
+          <p:cNvSpPr>
+            <a:spLocks xmlns:a="http://schemas.openxmlformats.org/drawingml/2006/main" noGrp="1"/>
+          </p:cNvSpPr>
+          <p:nvPr/>
+        </p:nvSpPr>
+        <p:spPr>
+          <a:xfrm xmlns:a="http://schemas.openxmlformats.org/drawingml/2006/main">
+            <a:off x="1771650" y="3848100"/>
+            <a:ext cx="1866900" cy="514350"/>
+          </a:xfrm>
+          <a:prstGeom xmlns:a="http://schemas.openxmlformats.org/drawingml/2006/main" prst="roundRect">
+            <a:avLst>
+              <a:gd name="adj" fmla="val 14815"/>
+            </a:avLst>
+          </a:prstGeom>
+          <a:solidFill xmlns:a="http://schemas.openxmlformats.org/drawingml/2006/main">
+            <a:srgbClr val="18354E"/>
+          </a:solidFill>
+          <a:ln xmlns:a="http://schemas.openxmlformats.org/drawingml/2006/main" w="0">
+            <a:noFill/>
+            <a:prstDash val="solid"/>
+          </a:ln>
+        </p:spPr>
+        <p:txBody>
+          <a:bodyPr xmlns:a="http://schemas.openxmlformats.org/drawingml/2006/main" lIns="76200" tIns="38100" rIns="76200" bIns="38100" anchor="ctr"/>
+          <a:lstStyle xmlns:a="http://schemas.openxmlformats.org/drawingml/2006/main"/>
+          <a:p xmlns:a="http://schemas.openxmlformats.org/drawingml/2006/main">
+            <a:pPr algn="ctr">
+              <a:lnSpc>
+                <a:spcPct val="110000"/>
+              </a:lnSpc>
+              <a:buNone/>
+              <a:defRPr sz="1350" b="1">
+                <a:solidFill>
+                  <a:srgbClr val="FFFFFF"/>
+                </a:solidFill>
+              </a:defRPr>
+            </a:pPr>
+            <a:r>
+              <a:rPr sz="1350" b="1">
+                <a:solidFill>
+                  <a:srgbClr val="FFFFFF"/>
+                </a:solidFill>
+                <a:latin typeface="Microsoft YaHei"/>
+                <a:ea typeface="Microsoft YaHei"/>
+                <a:cs typeface="Microsoft YaHei"/>
+              </a:rPr>
+              <a:t>具体条目</a:t>
+            </a:r>
+          </a:p>
+        </p:txBody>
+      </p:sp>
+      <p:sp>
+        <p:nvSpPr>
+          <p:cNvPr id="11" name="p151">
+            <a:extLst xmlns:a="http://schemas.openxmlformats.org/drawingml/2006/main">
+              <a:ext uri="{FF2B5EF4-FFF2-40B4-BE49-F238E27FC236}">
+                <a16:creationId xmlns:a16="http://schemas.microsoft.com/office/drawing/2014/main" id="{05673596-56B6-4686-BB69-2A978E4BF1FA}"/>
+              </a:ext>
+            </a:extLst>
+          </p:cNvPr>
+          <p:cNvSpPr>
+            <a:spLocks xmlns:a="http://schemas.openxmlformats.org/drawingml/2006/main" noGrp="1"/>
+          </p:cNvSpPr>
+          <p:nvPr/>
+        </p:nvSpPr>
+        <p:spPr>
+          <a:xfrm xmlns:a="http://schemas.openxmlformats.org/drawingml/2006/main">
+            <a:off x="4076700" y="3848100"/>
+            <a:ext cx="1866900" cy="514350"/>
+          </a:xfrm>
+          <a:prstGeom xmlns:a="http://schemas.openxmlformats.org/drawingml/2006/main" prst="roundRect">
+            <a:avLst>
+              <a:gd name="adj" fmla="val 14815"/>
+            </a:avLst>
+          </a:prstGeom>
+          <a:solidFill xmlns:a="http://schemas.openxmlformats.org/drawingml/2006/main">
+            <a:srgbClr val="18354E"/>
+          </a:solidFill>
+          <a:ln xmlns:a="http://schemas.openxmlformats.org/drawingml/2006/main" w="0">
+            <a:noFill/>
+            <a:prstDash val="solid"/>
+          </a:ln>
+        </p:spPr>
+        <p:txBody>
+          <a:bodyPr xmlns:a="http://schemas.openxmlformats.org/drawingml/2006/main" lIns="76200" tIns="38100" rIns="76200" bIns="38100" anchor="ctr"/>
+          <a:lstStyle xmlns:a="http://schemas.openxmlformats.org/drawingml/2006/main"/>
+          <a:p xmlns:a="http://schemas.openxmlformats.org/drawingml/2006/main">
+            <a:pPr algn="ctr">
+              <a:lnSpc>
+                <a:spcPct val="110000"/>
+              </a:lnSpc>
+              <a:buNone/>
+              <a:defRPr sz="1350" b="1">
+                <a:solidFill>
+                  <a:srgbClr val="FFFFFF"/>
+                </a:solidFill>
+              </a:defRPr>
+            </a:pPr>
+            <a:r>
+              <a:rPr sz="1350" b="1">
+                <a:solidFill>
+                  <a:srgbClr val="FFFFFF"/>
+                </a:solidFill>
+                <a:latin typeface="Microsoft YaHei"/>
+                <a:ea typeface="Microsoft YaHei"/>
+                <a:cs typeface="Microsoft YaHei"/>
+              </a:rPr>
+              <a:t>rubric 维度</a:t>
+            </a:r>
+          </a:p>
+        </p:txBody>
+      </p:sp>
+      <p:sp>
+        <p:nvSpPr>
+          <p:cNvPr id="12" name="p152">
+            <a:extLst xmlns:a="http://schemas.openxmlformats.org/drawingml/2006/main">
+              <a:ext uri="{FF2B5EF4-FFF2-40B4-BE49-F238E27FC236}">
+                <a16:creationId xmlns:a16="http://schemas.microsoft.com/office/drawing/2014/main" id="{F5199848-DF72-4373-9D63-BFF4DD3B8EF9}"/>
+              </a:ext>
+            </a:extLst>
+          </p:cNvPr>
+          <p:cNvSpPr>
+            <a:spLocks xmlns:a="http://schemas.openxmlformats.org/drawingml/2006/main" noGrp="1"/>
+          </p:cNvSpPr>
+          <p:nvPr/>
+        </p:nvSpPr>
+        <p:spPr>
+          <a:xfrm xmlns:a="http://schemas.openxmlformats.org/drawingml/2006/main">
+            <a:off x="6381750" y="3848100"/>
+            <a:ext cx="1866900" cy="514350"/>
+          </a:xfrm>
+          <a:prstGeom xmlns:a="http://schemas.openxmlformats.org/drawingml/2006/main" prst="roundRect">
+            <a:avLst>
+              <a:gd name="adj" fmla="val 14815"/>
+            </a:avLst>
+          </a:prstGeom>
+          <a:solidFill xmlns:a="http://schemas.openxmlformats.org/drawingml/2006/main">
+            <a:srgbClr val="C8161E"/>
+          </a:solidFill>
+          <a:ln xmlns:a="http://schemas.openxmlformats.org/drawingml/2006/main" w="0">
+            <a:noFill/>
+            <a:prstDash val="solid"/>
+          </a:ln>
+        </p:spPr>
+        <p:txBody>
+          <a:bodyPr xmlns:a="http://schemas.openxmlformats.org/drawingml/2006/main" lIns="76200" tIns="38100" rIns="76200" bIns="38100" anchor="ctr"/>
+          <a:lstStyle xmlns:a="http://schemas.openxmlformats.org/drawingml/2006/main"/>
+          <a:p xmlns:a="http://schemas.openxmlformats.org/drawingml/2006/main">
+            <a:pPr algn="ctr">
+              <a:lnSpc>
+                <a:spcPct val="110000"/>
+              </a:lnSpc>
+              <a:buNone/>
+              <a:defRPr sz="1350" b="1">
+                <a:solidFill>
+                  <a:srgbClr val="FFFFFF"/>
+                </a:solidFill>
+              </a:defRPr>
+            </a:pPr>
+            <a:r>
+              <a:rPr sz="1350" b="1">
+                <a:solidFill>
+                  <a:srgbClr val="FFFFFF"/>
+                </a:solidFill>
+                <a:latin typeface="Microsoft YaHei"/>
+                <a:ea typeface="Microsoft YaHei"/>
+                <a:cs typeface="Microsoft YaHei"/>
+              </a:rPr>
+              <a:t>风险等级</a:t>
+            </a:r>
+          </a:p>
+        </p:txBody>
+      </p:sp>
+      <p:sp>
+        <p:nvSpPr>
+          <p:cNvPr id="13" name="p153">
+            <a:extLst xmlns:a="http://schemas.openxmlformats.org/drawingml/2006/main">
+              <a:ext uri="{FF2B5EF4-FFF2-40B4-BE49-F238E27FC236}">
+                <a16:creationId xmlns:a16="http://schemas.microsoft.com/office/drawing/2014/main" id="{6B9662F0-F335-4269-8E8E-B92F5CC32B8B}"/>
+              </a:ext>
+            </a:extLst>
+          </p:cNvPr>
+          <p:cNvSpPr>
+            <a:spLocks xmlns:a="http://schemas.openxmlformats.org/drawingml/2006/main" noGrp="1"/>
+          </p:cNvSpPr>
+          <p:nvPr/>
+        </p:nvSpPr>
+        <p:spPr>
+          <a:xfrm xmlns:a="http://schemas.openxmlformats.org/drawingml/2006/main">
+            <a:off x="8686800" y="3848100"/>
+            <a:ext cx="1866900" cy="514350"/>
+          </a:xfrm>
+          <a:prstGeom xmlns:a="http://schemas.openxmlformats.org/drawingml/2006/main" prst="roundRect">
+            <a:avLst>
+              <a:gd name="adj" fmla="val 14815"/>
+            </a:avLst>
+          </a:prstGeom>
+          <a:solidFill xmlns:a="http://schemas.openxmlformats.org/drawingml/2006/main">
+            <a:srgbClr val="18354E"/>
+          </a:solidFill>
+          <a:ln xmlns:a="http://schemas.openxmlformats.org/drawingml/2006/main" w="0">
+            <a:noFill/>
+            <a:prstDash val="solid"/>
+          </a:ln>
+        </p:spPr>
+        <p:txBody>
+          <a:bodyPr xmlns:a="http://schemas.openxmlformats.org/drawingml/2006/main" lIns="76200" tIns="38100" rIns="76200" bIns="38100" anchor="ctr"/>
+          <a:lstStyle xmlns:a="http://schemas.openxmlformats.org/drawingml/2006/main"/>
+          <a:p xmlns:a="http://schemas.openxmlformats.org/drawingml/2006/main">
+            <a:pPr algn="ctr">
+              <a:lnSpc>
+                <a:spcPct val="110000"/>
+              </a:lnSpc>
+              <a:buNone/>
+              <a:defRPr sz="1350" b="1">
+                <a:solidFill>
+                  <a:srgbClr val="FFFFFF"/>
+                </a:solidFill>
+              </a:defRPr>
+            </a:pPr>
+            <a:r>
+              <a:rPr sz="1350" b="1">
+                <a:solidFill>
+                  <a:srgbClr val="FFFFFF"/>
+                </a:solidFill>
+                <a:latin typeface="Microsoft YaHei"/>
+                <a:ea typeface="Microsoft YaHei"/>
+                <a:cs typeface="Microsoft YaHei"/>
+              </a:rPr>
+              <a:t>可执行动作</a:t>
+            </a:r>
+          </a:p>
+        </p:txBody>
+      </p:sp>
+      <p:sp>
+        <p:nvSpPr>
+          <p:cNvPr id="14" name="p15c">
+            <a:extLst xmlns:a="http://schemas.openxmlformats.org/drawingml/2006/main">
+              <a:ext uri="{FF2B5EF4-FFF2-40B4-BE49-F238E27FC236}">
+                <a16:creationId xmlns:a16="http://schemas.microsoft.com/office/drawing/2014/main" id="{7497CE18-3517-47A7-BB22-9BB76D1B277D}"/>
+              </a:ext>
+            </a:extLst>
+          </p:cNvPr>
+          <p:cNvSpPr>
+            <a:spLocks xmlns:a="http://schemas.openxmlformats.org/drawingml/2006/main" noGrp="1"/>
+          </p:cNvSpPr>
+          <p:nvPr/>
+        </p:nvSpPr>
+        <p:spPr>
+          <a:xfrm xmlns:a="http://schemas.openxmlformats.org/drawingml/2006/main">
+            <a:off x="1428750" y="4857750"/>
+            <a:ext cx="9334500" cy="533400"/>
+          </a:xfrm>
+          <a:prstGeom xmlns:a="http://schemas.openxmlformats.org/drawingml/2006/main" prst="rect">
+            <a:avLst/>
+          </a:prstGeom>
+          <a:solidFill xmlns:a="http://schemas.openxmlformats.org/drawingml/2006/main">
+            <a:srgbClr val="F8E9EA"/>
+          </a:solidFill>
+          <a:ln xmlns:a="http://schemas.openxmlformats.org/drawingml/2006/main" w="0">
+            <a:noFill/>
+            <a:prstDash val="solid"/>
+          </a:ln>
+        </p:spPr>
+        <p:txBody>
+          <a:bodyPr xmlns:a="http://schemas.openxmlformats.org/drawingml/2006/main" lIns="76200" tIns="38100" rIns="76200" bIns="38100" anchor="ctr"/>
+          <a:lstStyle xmlns:a="http://schemas.openxmlformats.org/drawingml/2006/main"/>
+          <a:p xmlns:a="http://schemas.openxmlformats.org/drawingml/2006/main">
+            <a:pPr algn="ctr">
+              <a:lnSpc>
+                <a:spcPct val="110000"/>
+              </a:lnSpc>
+              <a:buNone/>
+              <a:defRPr sz="1650" b="1">
+                <a:solidFill>
+                  <a:srgbClr val="C8161E"/>
+                </a:solidFill>
+              </a:defRPr>
+            </a:pPr>
+            <a:r>
+              <a:rPr sz="1650" b="1">
+                <a:solidFill>
+                  <a:srgbClr val="C8161E"/>
+                </a:solidFill>
+                <a:latin typeface="Microsoft YaHei"/>
+                <a:ea typeface="Microsoft YaHei"/>
+                <a:cs typeface="Microsoft YaHei"/>
+              </a:rPr>
+              <a:t>从评价人，改为描述工作、风险与最小动作。</a:t>
+            </a:r>
+          </a:p>
+        </p:txBody>
+      </p:sp>
+    </p:spTree>
+    <p:extLst>
+      <p:ext uri="{BB962C8B-B14F-4D97-AF65-F5344CB8AC3E}">
+        <p14:creationId xmlns:p14="http://schemas.microsoft.com/office/powerpoint/2010/main" val="1443728403"/>
+      </p:ext>
+    </p:extLst>
+  </p:cSld>
+</p:sld>
+</file>
+
+<file path=ppt/slides/slide17.xml><?xml version="1.0" encoding="utf-8"?>
+<p:sld xmlns:p="http://schemas.openxmlformats.org/presentationml/2006/main">
+  <p:cSld>
+    <p:spTree>
+      <p:nvGrpSpPr>
+        <p:cNvPr id="1" name=""/>
+        <p:cNvGrpSpPr/>
+        <p:nvPr/>
+      </p:nvGrpSpPr>
+      <p:grpSpPr>
+        <a:xfrm xmlns:a="http://schemas.openxmlformats.org/drawingml/2006/main"/>
+      </p:grpSpPr>
+      <p:sp>
+        <p:nvSpPr>
+          <p:cNvPr id="4" name="Text Placeholder 3">
+            <a:extLst xmlns:a="http://schemas.openxmlformats.org/drawingml/2006/main">
+              <a:ext uri="{FF2B5EF4-FFF2-40B4-BE49-F238E27FC236}">
+                <a16:creationId xmlns:a16="http://schemas.microsoft.com/office/drawing/2014/main" id="{4D941B40-7A0A-534E-3563-CA11753C8E3F}"/>
+              </a:ext>
+            </a:extLst>
+          </p:cNvPr>
+          <p:cNvSpPr>
+            <a:spLocks xmlns:a="http://schemas.openxmlformats.org/drawingml/2006/main" noGrp="1"/>
+          </p:cNvSpPr>
+          <p:nvPr>
+            <p:ph type="body" idx="14"/>
+          </p:nvPr>
+        </p:nvSpPr>
+        <p:spPr>
+          <a:xfrm xmlns:a="http://schemas.openxmlformats.org/drawingml/2006/main">
+            <a:off x="1028700" y="28575"/>
+            <a:ext cx="10668000" cy="628650"/>
+          </a:xfrm>
+        </p:spPr>
+        <p:txBody>
+          <a:bodyPr xmlns:a="http://schemas.openxmlformats.org/drawingml/2006/main" lIns="76200" tIns="0" rIns="76200" bIns="0" anchor="ctr"/>
+          <a:lstStyle xmlns:a="http://schemas.openxmlformats.org/drawingml/2006/main"/>
+          <a:p xmlns:a="http://schemas.openxmlformats.org/drawingml/2006/main">
+            <a:pPr algn="l">
+              <a:lnSpc>
+                <a:spcPct val="110000"/>
+              </a:lnSpc>
+              <a:buNone/>
+            </a:pPr>
+            <a:r>
+              <a:rPr sz="2175" b="1">
+                <a:solidFill>
+                  <a:srgbClr val="FFFFFF"/>
+                </a:solidFill>
+                <a:latin typeface="Microsoft YaHei"/>
+                <a:ea typeface="Microsoft YaHei"/>
+                <a:cs typeface="Microsoft YaHei"/>
+              </a:rPr>
+              <a:t>备用退出卡：作者保留最终决定权</a:t>
+            </a:r>
+            <a:endParaRPr/>
+          </a:p>
+        </p:txBody>
+      </p:sp>
+      <p:sp>
+        <p:nvSpPr>
+          <p:cNvPr id="5" name="Slide Number Placeholder 4">
+            <a:extLst xmlns:a="http://schemas.openxmlformats.org/drawingml/2006/main">
+              <a:ext uri="{FF2B5EF4-FFF2-40B4-BE49-F238E27FC236}">
+                <a16:creationId xmlns:a16="http://schemas.microsoft.com/office/drawing/2014/main" id="{EBA5909F-738E-F60C-BE8C-B3F1D94548E5}"/>
+              </a:ext>
+            </a:extLst>
+          </p:cNvPr>
+          <p:cNvSpPr>
+            <a:spLocks xmlns:a="http://schemas.openxmlformats.org/drawingml/2006/main" noGrp="1"/>
+          </p:cNvSpPr>
+          <p:nvPr>
+            <p:ph type="sldNum" idx="10"/>
+          </p:nvPr>
+        </p:nvSpPr>
+        <p:spPr/>
+        <p:txBody>
+          <a:bodyPr xmlns:a="http://schemas.openxmlformats.org/drawingml/2006/main"/>
+          <a:lstStyle xmlns:a="http://schemas.openxmlformats.org/drawingml/2006/main"/>
+          <a:p xmlns:a="http://schemas.openxmlformats.org/drawingml/2006/main">
+            <a:fld id="{90F7333B-44AC-F7E9-D49D-FE92F45E0477}" type="slidenum">
+              <a:t>17</a:t>
             </a:fld>
             <a:endParaRPr/>
           </a:p>
